--- a/ANGOVO _Innovix.pptx
+++ b/ANGOVO _Innovix.pptx
@@ -6,17 +6,14 @@
   </p:sldMasterIdLst>
   <p:sldIdLst>
     <p:sldId id="256" r:id="rId3"/>
-    <p:sldId id="257" r:id="rId4"/>
-    <p:sldId id="258" r:id="rId5"/>
-    <p:sldId id="259" r:id="rId6"/>
-    <p:sldId id="260" r:id="rId7"/>
-    <p:sldId id="261" r:id="rId8"/>
-    <p:sldId id="262" r:id="rId9"/>
-    <p:sldId id="263" r:id="rId10"/>
-    <p:sldId id="264" r:id="rId11"/>
-    <p:sldId id="265" r:id="rId12"/>
-    <p:sldId id="266" r:id="rId13"/>
-    <p:sldId id="267" r:id="rId14"/>
+    <p:sldId id="258" r:id="rId4"/>
+    <p:sldId id="259" r:id="rId5"/>
+    <p:sldId id="260" r:id="rId6"/>
+    <p:sldId id="261" r:id="rId7"/>
+    <p:sldId id="263" r:id="rId8"/>
+    <p:sldId id="265" r:id="rId9"/>
+    <p:sldId id="266" r:id="rId10"/>
+    <p:sldId id="267" r:id="rId11"/>
   </p:sldIdLst>
   <p:sldSz cx="12192000" cy="6858000" type="screen4x3"/>
   <p:notesSz cx="6858000" cy="9144000"/>
@@ -3136,7 +3133,2419 @@
 </p:sld>
 </file>
 
-<file path=ppt/slides/slide10.xml><?xml version="1.0" encoding="utf-8"?>
+<file path=ppt/slides/slide2.xml><?xml version="1.0" encoding="utf-8"?>
+<p:sld xmlns:a="http://schemas.openxmlformats.org/drawingml/2006/main" xmlns:r="http://schemas.openxmlformats.org/officeDocument/2006/relationships" xmlns:p="http://schemas.openxmlformats.org/presentationml/2006/main">
+  <p:cSld>
+    <p:bg>
+      <p:bgPr>
+        <a:solidFill>
+          <a:srgbClr val="0F172A"/>
+        </a:solidFill>
+        <a:effectLst/>
+      </p:bgPr>
+    </p:bg>
+    <p:spTree>
+      <p:nvGrpSpPr>
+        <p:cNvPr id="1" name=""/>
+        <p:cNvGrpSpPr/>
+        <p:nvPr/>
+      </p:nvGrpSpPr>
+      <p:grpSpPr/>
+      <p:pic>
+        <p:nvPicPr>
+          <p:cNvPr id="2" name="Picture 1" descr="image.png"/>
+          <p:cNvPicPr>
+            <a:picLocks noChangeAspect="1"/>
+          </p:cNvPicPr>
+          <p:nvPr/>
+        </p:nvPicPr>
+        <p:blipFill>
+          <a:blip r:embed="rId1"/>
+          <a:stretch>
+            <a:fillRect/>
+          </a:stretch>
+        </p:blipFill>
+        <p:spPr>
+          <a:xfrm>
+            <a:off x="0" y="0"/>
+            <a:ext cx="12192000" cy="6858000"/>
+          </a:xfrm>
+          <a:prstGeom prst="rect">
+            <a:avLst/>
+          </a:prstGeom>
+        </p:spPr>
+      </p:pic>
+      <p:pic>
+        <p:nvPicPr>
+          <p:cNvPr id="3" name="Picture 2" descr="image.png"/>
+          <p:cNvPicPr>
+            <a:picLocks noChangeAspect="1"/>
+          </p:cNvPicPr>
+          <p:nvPr/>
+        </p:nvPicPr>
+        <p:blipFill>
+          <a:blip r:embed="rId2"/>
+          <a:stretch>
+            <a:fillRect/>
+          </a:stretch>
+        </p:blipFill>
+        <p:spPr>
+          <a:xfrm>
+            <a:off x="571500" y="1776412"/>
+            <a:ext cx="3492549" cy="4305300"/>
+          </a:xfrm>
+          <a:prstGeom prst="rect">
+            <a:avLst/>
+          </a:prstGeom>
+        </p:spPr>
+      </p:pic>
+      <p:pic>
+        <p:nvPicPr>
+          <p:cNvPr id="4" name="Picture 3" descr="image.png"/>
+          <p:cNvPicPr>
+            <a:picLocks noChangeAspect="1"/>
+          </p:cNvPicPr>
+          <p:nvPr/>
+        </p:nvPicPr>
+        <p:blipFill>
+          <a:blip r:embed="rId3"/>
+          <a:stretch>
+            <a:fillRect/>
+          </a:stretch>
+        </p:blipFill>
+        <p:spPr>
+          <a:xfrm>
+            <a:off x="4349799" y="1776412"/>
+            <a:ext cx="3492549" cy="4305300"/>
+          </a:xfrm>
+          <a:prstGeom prst="rect">
+            <a:avLst/>
+          </a:prstGeom>
+        </p:spPr>
+      </p:pic>
+      <p:pic>
+        <p:nvPicPr>
+          <p:cNvPr id="5" name="Picture 4" descr="image.png"/>
+          <p:cNvPicPr>
+            <a:picLocks noChangeAspect="1"/>
+          </p:cNvPicPr>
+          <p:nvPr/>
+        </p:nvPicPr>
+        <p:blipFill>
+          <a:blip r:embed="rId4"/>
+          <a:stretch>
+            <a:fillRect/>
+          </a:stretch>
+        </p:blipFill>
+        <p:spPr>
+          <a:xfrm>
+            <a:off x="8128099" y="1776412"/>
+            <a:ext cx="3492549" cy="4305300"/>
+          </a:xfrm>
+          <a:prstGeom prst="rect">
+            <a:avLst/>
+          </a:prstGeom>
+        </p:spPr>
+      </p:pic>
+      <p:sp>
+        <p:nvSpPr>
+          <p:cNvPr id="6" name="TextBox 5"/>
+          <p:cNvSpPr txBox="1"/>
+          <p:nvPr/>
+        </p:nvSpPr>
+        <p:spPr>
+          <a:xfrm>
+            <a:off x="962025" y="2986087"/>
+            <a:ext cx="2847074" cy="400050"/>
+          </a:xfrm>
+          <a:prstGeom prst="rect">
+            <a:avLst/>
+          </a:prstGeom>
+          <a:noFill/>
+        </p:spPr>
+        <p:txBody>
+          <a:bodyPr wrap="square" lIns="0" tIns="0" rIns="0" bIns="0" anchor="t">
+            <a:spAutoFit/>
+          </a:bodyPr>
+          <a:lstStyle/>
+          <a:p>
+            <a:pPr algn="l"/>
+            <a:r>
+              <a:rPr sz="2100" b="1" i="0" u="none">
+                <a:solidFill>
+                  <a:srgbClr val="22C55E"/>
+                </a:solidFill>
+                <a:latin typeface="Poppins"/>
+              </a:rPr>
+              <a:t>Factures Opaques</a:t>
+            </a:r>
+            <a:endParaRPr sz="2100" b="1" i="0" u="none">
+              <a:solidFill>
+                <a:srgbClr val="22C55E"/>
+              </a:solidFill>
+              <a:latin typeface="Poppins"/>
+            </a:endParaRPr>
+          </a:p>
+        </p:txBody>
+      </p:sp>
+      <p:sp>
+        <p:nvSpPr>
+          <p:cNvPr id="7" name="TextBox 6"/>
+          <p:cNvSpPr txBox="1"/>
+          <p:nvPr/>
+        </p:nvSpPr>
+        <p:spPr>
+          <a:xfrm>
+            <a:off x="962025" y="3576637"/>
+            <a:ext cx="2711499" cy="1524000"/>
+          </a:xfrm>
+          <a:prstGeom prst="rect">
+            <a:avLst/>
+          </a:prstGeom>
+          <a:noFill/>
+        </p:spPr>
+        <p:txBody>
+          <a:bodyPr wrap="square" lIns="0" tIns="0" rIns="0" bIns="0" anchor="t">
+            <a:spAutoFit/>
+          </a:bodyPr>
+          <a:lstStyle/>
+          <a:p>
+            <a:pPr algn="l">
+              <a:lnSpc>
+                <a:spcPts val="2400"/>
+              </a:lnSpc>
+            </a:pPr>
+            <a:r>
+              <a:rPr sz="1500" b="0" i="0" u="none">
+                <a:solidFill>
+                  <a:srgbClr val="CBD5E1"/>
+                </a:solidFill>
+                <a:latin typeface="Urbanist"/>
+              </a:rPr>
+              <a:t>Des relevés complexes et difficiles à interpréter, empêchant toute visibilité sur la répartition des coûts réels au sein du foyer.</a:t>
+            </a:r>
+            <a:endParaRPr sz="1500" b="0" i="0" u="none">
+              <a:solidFill>
+                <a:srgbClr val="CBD5E1"/>
+              </a:solidFill>
+              <a:latin typeface="Urbanist"/>
+            </a:endParaRPr>
+          </a:p>
+        </p:txBody>
+      </p:sp>
+      <p:sp>
+        <p:nvSpPr>
+          <p:cNvPr id="8" name="TextBox 7"/>
+          <p:cNvSpPr txBox="1"/>
+          <p:nvPr/>
+        </p:nvSpPr>
+        <p:spPr>
+          <a:xfrm>
+            <a:off x="4740324" y="2986087"/>
+            <a:ext cx="2847074" cy="400050"/>
+          </a:xfrm>
+          <a:prstGeom prst="rect">
+            <a:avLst/>
+          </a:prstGeom>
+          <a:noFill/>
+        </p:spPr>
+        <p:txBody>
+          <a:bodyPr wrap="square" lIns="0" tIns="0" rIns="0" bIns="0" anchor="t">
+            <a:spAutoFit/>
+          </a:bodyPr>
+          <a:lstStyle/>
+          <a:p>
+            <a:pPr algn="l"/>
+            <a:r>
+              <a:rPr sz="2100" b="1" i="0" u="none">
+                <a:solidFill>
+                  <a:srgbClr val="22C55E"/>
+                </a:solidFill>
+                <a:latin typeface="Poppins"/>
+              </a:rPr>
+              <a:t>Suivi Impossible</a:t>
+            </a:r>
+            <a:endParaRPr sz="2100" b="1" i="0" u="none">
+              <a:solidFill>
+                <a:srgbClr val="22C55E"/>
+              </a:solidFill>
+              <a:latin typeface="Poppins"/>
+            </a:endParaRPr>
+          </a:p>
+        </p:txBody>
+      </p:sp>
+      <p:sp>
+        <p:nvSpPr>
+          <p:cNvPr id="9" name="TextBox 8"/>
+          <p:cNvSpPr txBox="1"/>
+          <p:nvPr/>
+        </p:nvSpPr>
+        <p:spPr>
+          <a:xfrm>
+            <a:off x="4740324" y="3576637"/>
+            <a:ext cx="2711499" cy="1524000"/>
+          </a:xfrm>
+          <a:prstGeom prst="rect">
+            <a:avLst/>
+          </a:prstGeom>
+          <a:noFill/>
+        </p:spPr>
+        <p:txBody>
+          <a:bodyPr wrap="square" lIns="0" tIns="0" rIns="0" bIns="0" anchor="t">
+            <a:spAutoFit/>
+          </a:bodyPr>
+          <a:lstStyle/>
+          <a:p>
+            <a:pPr algn="l">
+              <a:lnSpc>
+                <a:spcPts val="2400"/>
+              </a:lnSpc>
+            </a:pPr>
+            <a:r>
+              <a:rPr sz="1500" b="0" i="0" u="none">
+                <a:solidFill>
+                  <a:srgbClr val="CBD5E1"/>
+                </a:solidFill>
+                <a:latin typeface="Urbanist"/>
+              </a:rPr>
+              <a:t>L'absence d'outils de monitoring en temps réel rend la gestion de la consommation quotidienne purement réactive et inefficace.</a:t>
+            </a:r>
+            <a:endParaRPr sz="1500" b="0" i="0" u="none">
+              <a:solidFill>
+                <a:srgbClr val="CBD5E1"/>
+              </a:solidFill>
+              <a:latin typeface="Urbanist"/>
+            </a:endParaRPr>
+          </a:p>
+        </p:txBody>
+      </p:sp>
+      <p:sp>
+        <p:nvSpPr>
+          <p:cNvPr id="10" name="TextBox 9"/>
+          <p:cNvSpPr txBox="1"/>
+          <p:nvPr/>
+        </p:nvSpPr>
+        <p:spPr>
+          <a:xfrm>
+            <a:off x="8518624" y="2986087"/>
+            <a:ext cx="2847074" cy="800100"/>
+          </a:xfrm>
+          <a:prstGeom prst="rect">
+            <a:avLst/>
+          </a:prstGeom>
+          <a:noFill/>
+        </p:spPr>
+        <p:txBody>
+          <a:bodyPr wrap="square" lIns="0" tIns="0" rIns="0" bIns="0" anchor="t">
+            <a:spAutoFit/>
+          </a:bodyPr>
+          <a:lstStyle/>
+          <a:p>
+            <a:pPr algn="l"/>
+            <a:r>
+              <a:rPr sz="2100" b="1" i="0" u="none">
+                <a:solidFill>
+                  <a:srgbClr val="22C55E"/>
+                </a:solidFill>
+                <a:latin typeface="Poppins"/>
+              </a:rPr>
+              <a:t>Dépenses Imprévues</a:t>
+            </a:r>
+            <a:endParaRPr sz="2100" b="1" i="0" u="none">
+              <a:solidFill>
+                <a:srgbClr val="22C55E"/>
+              </a:solidFill>
+              <a:latin typeface="Poppins"/>
+            </a:endParaRPr>
+          </a:p>
+        </p:txBody>
+      </p:sp>
+      <p:sp>
+        <p:nvSpPr>
+          <p:cNvPr id="11" name="TextBox 10"/>
+          <p:cNvSpPr txBox="1"/>
+          <p:nvPr/>
+        </p:nvSpPr>
+        <p:spPr>
+          <a:xfrm>
+            <a:off x="8518624" y="3976687"/>
+            <a:ext cx="2711499" cy="1524000"/>
+          </a:xfrm>
+          <a:prstGeom prst="rect">
+            <a:avLst/>
+          </a:prstGeom>
+          <a:noFill/>
+        </p:spPr>
+        <p:txBody>
+          <a:bodyPr wrap="square" lIns="0" tIns="0" rIns="0" bIns="0" anchor="t">
+            <a:spAutoFit/>
+          </a:bodyPr>
+          <a:lstStyle/>
+          <a:p>
+            <a:pPr algn="l">
+              <a:lnSpc>
+                <a:spcPts val="2400"/>
+              </a:lnSpc>
+            </a:pPr>
+            <a:r>
+              <a:rPr sz="1500" b="0" i="0" u="none">
+                <a:solidFill>
+                  <a:srgbClr val="CBD5E1"/>
+                </a:solidFill>
+                <a:latin typeface="Urbanist"/>
+              </a:rPr>
+              <a:t>Des pics de consommation non détectés entraînant des surcoûts majeurs et une instabilité budgétaire pour les familles.</a:t>
+            </a:r>
+            <a:endParaRPr sz="1500" b="0" i="0" u="none">
+              <a:solidFill>
+                <a:srgbClr val="CBD5E1"/>
+              </a:solidFill>
+              <a:latin typeface="Urbanist"/>
+            </a:endParaRPr>
+          </a:p>
+        </p:txBody>
+      </p:sp>
+      <p:pic>
+        <p:nvPicPr>
+          <p:cNvPr id="12" name="Picture 11" descr="image.png"/>
+          <p:cNvPicPr>
+            <a:picLocks noChangeAspect="1"/>
+          </p:cNvPicPr>
+          <p:nvPr/>
+        </p:nvPicPr>
+        <p:blipFill>
+          <a:blip r:embed="rId5"/>
+          <a:stretch>
+            <a:fillRect/>
+          </a:stretch>
+        </p:blipFill>
+        <p:spPr>
+          <a:xfrm>
+            <a:off x="962025" y="2205037"/>
+            <a:ext cx="361950" cy="476250"/>
+          </a:xfrm>
+          <a:prstGeom prst="rect">
+            <a:avLst/>
+          </a:prstGeom>
+        </p:spPr>
+      </p:pic>
+      <p:pic>
+        <p:nvPicPr>
+          <p:cNvPr id="13" name="Picture 12" descr="image.png"/>
+          <p:cNvPicPr>
+            <a:picLocks noChangeAspect="1"/>
+          </p:cNvPicPr>
+          <p:nvPr/>
+        </p:nvPicPr>
+        <p:blipFill>
+          <a:blip r:embed="rId6"/>
+          <a:stretch>
+            <a:fillRect/>
+          </a:stretch>
+        </p:blipFill>
+        <p:spPr>
+          <a:xfrm>
+            <a:off x="8518624" y="2205037"/>
+            <a:ext cx="476250" cy="476250"/>
+          </a:xfrm>
+          <a:prstGeom prst="rect">
+            <a:avLst/>
+          </a:prstGeom>
+        </p:spPr>
+      </p:pic>
+      <p:sp>
+        <p:nvSpPr>
+          <p:cNvPr id="14" name="TextBox 13"/>
+          <p:cNvSpPr txBox="1"/>
+          <p:nvPr/>
+        </p:nvSpPr>
+        <p:spPr>
+          <a:xfrm>
+            <a:off x="762000" y="571500"/>
+            <a:ext cx="11401425" cy="619125"/>
+          </a:xfrm>
+          <a:prstGeom prst="rect">
+            <a:avLst/>
+          </a:prstGeom>
+          <a:noFill/>
+        </p:spPr>
+        <p:txBody>
+          <a:bodyPr wrap="square" lIns="0" tIns="0" rIns="0" bIns="0" anchor="t">
+            <a:spAutoFit/>
+          </a:bodyPr>
+          <a:lstStyle/>
+          <a:p>
+            <a:pPr algn="l"/>
+            <a:r>
+              <a:rPr sz="3300" b="1" i="0" u="none">
+                <a:solidFill>
+                  <a:srgbClr val="FFFFFF"/>
+                </a:solidFill>
+                <a:latin typeface="Poppins"/>
+              </a:rPr>
+              <a:t>LA PROBLÉMATIQUE ACTUELLE</a:t>
+            </a:r>
+            <a:endParaRPr sz="3300" b="1" i="0" u="none">
+              <a:solidFill>
+                <a:srgbClr val="FFFFFF"/>
+              </a:solidFill>
+              <a:latin typeface="Poppins"/>
+            </a:endParaRPr>
+          </a:p>
+        </p:txBody>
+      </p:sp>
+      <p:sp>
+        <p:nvSpPr>
+          <p:cNvPr id="15" name="Rectangle 14"/>
+          <p:cNvSpPr/>
+          <p:nvPr/>
+        </p:nvSpPr>
+        <p:spPr>
+          <a:xfrm>
+            <a:off x="571500" y="571500"/>
+            <a:ext cx="57150" cy="619125"/>
+          </a:xfrm>
+          <a:prstGeom prst="rect">
+            <a:avLst/>
+          </a:prstGeom>
+          <a:solidFill>
+            <a:srgbClr val="F97316"/>
+          </a:solidFill>
+          <a:ln>
+            <a:noFill/>
+          </a:ln>
+          <a:effectLst/>
+        </p:spPr>
+        <p:style>
+          <a:lnRef idx="1">
+            <a:schemeClr val="accent1"/>
+          </a:lnRef>
+          <a:fillRef idx="3">
+            <a:schemeClr val="accent1"/>
+          </a:fillRef>
+          <a:effectRef idx="2">
+            <a:schemeClr val="accent1"/>
+          </a:effectRef>
+          <a:fontRef idx="minor">
+            <a:schemeClr val="lt1"/>
+          </a:fontRef>
+        </p:style>
+        <p:txBody>
+          <a:bodyPr rtlCol="0" anchor="ctr"/>
+          <a:lstStyle/>
+          <a:p>
+            <a:pPr algn="ctr"/>
+          </a:p>
+        </p:txBody>
+      </p:sp>
+    </p:spTree>
+  </p:cSld>
+  <p:clrMapOvr>
+    <a:masterClrMapping/>
+  </p:clrMapOvr>
+</p:sld>
+</file>
+
+<file path=ppt/slides/slide3.xml><?xml version="1.0" encoding="utf-8"?>
+<p:sld xmlns:a="http://schemas.openxmlformats.org/drawingml/2006/main" xmlns:r="http://schemas.openxmlformats.org/officeDocument/2006/relationships" xmlns:p="http://schemas.openxmlformats.org/presentationml/2006/main">
+  <p:cSld>
+    <p:bg>
+      <p:bgPr>
+        <a:solidFill>
+          <a:srgbClr val="0F172A"/>
+        </a:solidFill>
+        <a:effectLst/>
+      </p:bgPr>
+    </p:bg>
+    <p:spTree>
+      <p:nvGrpSpPr>
+        <p:cNvPr id="1" name=""/>
+        <p:cNvGrpSpPr/>
+        <p:nvPr/>
+      </p:nvGrpSpPr>
+      <p:grpSpPr/>
+      <p:pic>
+        <p:nvPicPr>
+          <p:cNvPr id="2" name="Picture 1" descr="image.png"/>
+          <p:cNvPicPr>
+            <a:picLocks noChangeAspect="1"/>
+          </p:cNvPicPr>
+          <p:nvPr/>
+        </p:nvPicPr>
+        <p:blipFill>
+          <a:blip r:embed="rId1"/>
+          <a:stretch>
+            <a:fillRect/>
+          </a:stretch>
+        </p:blipFill>
+        <p:spPr>
+          <a:xfrm>
+            <a:off x="0" y="0"/>
+            <a:ext cx="12192000" cy="6858000"/>
+          </a:xfrm>
+          <a:prstGeom prst="rect">
+            <a:avLst/>
+          </a:prstGeom>
+        </p:spPr>
+      </p:pic>
+      <p:pic>
+        <p:nvPicPr>
+          <p:cNvPr id="3" name="Picture 2" descr="image.png"/>
+          <p:cNvPicPr>
+            <a:picLocks noChangeAspect="1"/>
+          </p:cNvPicPr>
+          <p:nvPr/>
+        </p:nvPicPr>
+        <p:blipFill>
+          <a:blip r:embed="rId2"/>
+          <a:stretch>
+            <a:fillRect/>
+          </a:stretch>
+        </p:blipFill>
+        <p:spPr>
+          <a:xfrm>
+            <a:off x="6381750" y="1785937"/>
+            <a:ext cx="5238750" cy="4286250"/>
+          </a:xfrm>
+          <a:prstGeom prst="rect">
+            <a:avLst/>
+          </a:prstGeom>
+        </p:spPr>
+      </p:pic>
+      <p:sp>
+        <p:nvSpPr>
+          <p:cNvPr id="4" name="TextBox 3"/>
+          <p:cNvSpPr txBox="1"/>
+          <p:nvPr/>
+        </p:nvSpPr>
+        <p:spPr>
+          <a:xfrm>
+            <a:off x="571500" y="2052637"/>
+            <a:ext cx="5500687" cy="1047750"/>
+          </a:xfrm>
+          <a:prstGeom prst="rect">
+            <a:avLst/>
+          </a:prstGeom>
+          <a:noFill/>
+        </p:spPr>
+        <p:txBody>
+          <a:bodyPr wrap="square" lIns="0" tIns="0" rIns="0" bIns="0" anchor="t">
+            <a:spAutoFit/>
+          </a:bodyPr>
+          <a:lstStyle/>
+          <a:p>
+            <a:pPr algn="l"/>
+            <a:r>
+              <a:rPr sz="2700" b="1" i="0" u="none">
+                <a:solidFill>
+                  <a:srgbClr val="22C55E"/>
+                </a:solidFill>
+                <a:latin typeface="Poppins"/>
+              </a:rPr>
+              <a:t>Redonner le pouvoir aux utilisateurs</a:t>
+            </a:r>
+            <a:endParaRPr sz="2700" b="1" i="0" u="none">
+              <a:solidFill>
+                <a:srgbClr val="22C55E"/>
+              </a:solidFill>
+              <a:latin typeface="Poppins"/>
+            </a:endParaRPr>
+          </a:p>
+        </p:txBody>
+      </p:sp>
+      <p:sp>
+        <p:nvSpPr>
+          <p:cNvPr id="5" name="TextBox 4"/>
+          <p:cNvSpPr txBox="1"/>
+          <p:nvPr/>
+        </p:nvSpPr>
+        <p:spPr>
+          <a:xfrm>
+            <a:off x="571500" y="3290887"/>
+            <a:ext cx="5238750" cy="1524000"/>
+          </a:xfrm>
+          <a:prstGeom prst="rect">
+            <a:avLst/>
+          </a:prstGeom>
+          <a:noFill/>
+        </p:spPr>
+        <p:txBody>
+          <a:bodyPr wrap="square" lIns="0" tIns="0" rIns="0" bIns="0" anchor="t">
+            <a:spAutoFit/>
+          </a:bodyPr>
+          <a:lstStyle/>
+          <a:p>
+            <a:pPr algn="l">
+              <a:lnSpc>
+                <a:spcPts val="2400"/>
+              </a:lnSpc>
+            </a:pPr>
+            <a:r>
+              <a:rPr sz="1500" b="0" i="0" u="none">
+                <a:solidFill>
+                  <a:srgbClr val="CBD5E1"/>
+                </a:solidFill>
+                <a:latin typeface="Urbanist"/>
+              </a:rPr>
+              <a:t>Chez </a:t>
+            </a:r>
+            <a:r>
+              <a:rPr sz="1500" b="1" i="0" u="none">
+                <a:solidFill>
+                  <a:srgbClr val="CBD5E1"/>
+                </a:solidFill>
+                <a:latin typeface="Urbanist"/>
+              </a:rPr>
+              <a:t>ANGOVO</a:t>
+            </a:r>
+            <a:r>
+              <a:rPr sz="1500" b="0" i="0" u="none">
+                <a:solidFill>
+                  <a:srgbClr val="CBD5E1"/>
+                </a:solidFill>
+                <a:latin typeface="Urbanist"/>
+              </a:rPr>
+              <a:t>, nous croyons que la technologie doit simplifier la vie. Notre plateforme transforme les données brutes en informations exploitables, permettant à chaque foyer malgache de devenir acteur de sa propre transition énergétique.</a:t>
+            </a:r>
+            <a:endParaRPr sz="1500" b="0" i="0" u="none">
+              <a:solidFill>
+                <a:srgbClr val="CBD5E1"/>
+              </a:solidFill>
+              <a:latin typeface="Urbanist"/>
+            </a:endParaRPr>
+          </a:p>
+        </p:txBody>
+      </p:sp>
+      <p:sp>
+        <p:nvSpPr>
+          <p:cNvPr id="6" name="TextBox 5"/>
+          <p:cNvSpPr txBox="1"/>
+          <p:nvPr/>
+        </p:nvSpPr>
+        <p:spPr>
+          <a:xfrm>
+            <a:off x="571500" y="5005387"/>
+            <a:ext cx="5238750" cy="609600"/>
+          </a:xfrm>
+          <a:prstGeom prst="rect">
+            <a:avLst/>
+          </a:prstGeom>
+          <a:noFill/>
+        </p:spPr>
+        <p:txBody>
+          <a:bodyPr wrap="square" lIns="0" tIns="0" rIns="0" bIns="0" anchor="t">
+            <a:spAutoFit/>
+          </a:bodyPr>
+          <a:lstStyle/>
+          <a:p>
+            <a:pPr algn="l">
+              <a:lnSpc>
+                <a:spcPts val="2400"/>
+              </a:lnSpc>
+            </a:pPr>
+            <a:r>
+              <a:rPr sz="1500" b="0" i="0" u="none">
+                <a:solidFill>
+                  <a:srgbClr val="CBD5E1"/>
+                </a:solidFill>
+                <a:latin typeface="Urbanist"/>
+              </a:rPr>
+              <a:t>Grâce à une interface moderne et intuitive, gérez vos ressources comme jamais auparavant.</a:t>
+            </a:r>
+            <a:endParaRPr sz="1500" b="0" i="0" u="none">
+              <a:solidFill>
+                <a:srgbClr val="CBD5E1"/>
+              </a:solidFill>
+              <a:latin typeface="Urbanist"/>
+            </a:endParaRPr>
+          </a:p>
+        </p:txBody>
+      </p:sp>
+      <p:pic>
+        <p:nvPicPr>
+          <p:cNvPr id="7" name="Picture 6" descr="image.png"/>
+          <p:cNvPicPr>
+            <a:picLocks noChangeAspect="1"/>
+          </p:cNvPicPr>
+          <p:nvPr/>
+        </p:nvPicPr>
+        <p:blipFill>
+          <a:blip r:embed="rId3"/>
+          <a:stretch>
+            <a:fillRect/>
+          </a:stretch>
+        </p:blipFill>
+        <p:spPr>
+          <a:xfrm>
+            <a:off x="6391275" y="1795462"/>
+            <a:ext cx="5219700" cy="4267200"/>
+          </a:xfrm>
+          <a:prstGeom prst="rect">
+            <a:avLst/>
+          </a:prstGeom>
+        </p:spPr>
+      </p:pic>
+      <p:sp>
+        <p:nvSpPr>
+          <p:cNvPr id="8" name="TextBox 7"/>
+          <p:cNvSpPr txBox="1"/>
+          <p:nvPr/>
+        </p:nvSpPr>
+        <p:spPr>
+          <a:xfrm>
+            <a:off x="762000" y="571500"/>
+            <a:ext cx="11401425" cy="619125"/>
+          </a:xfrm>
+          <a:prstGeom prst="rect">
+            <a:avLst/>
+          </a:prstGeom>
+          <a:noFill/>
+        </p:spPr>
+        <p:txBody>
+          <a:bodyPr wrap="square" lIns="0" tIns="0" rIns="0" bIns="0" anchor="t">
+            <a:spAutoFit/>
+          </a:bodyPr>
+          <a:lstStyle/>
+          <a:p>
+            <a:pPr algn="l"/>
+            <a:r>
+              <a:rPr sz="3300" b="1" i="0" u="none">
+                <a:solidFill>
+                  <a:srgbClr val="FFFFFF"/>
+                </a:solidFill>
+                <a:latin typeface="Poppins"/>
+              </a:rPr>
+              <a:t>UNE VISION INTELLIGENTE</a:t>
+            </a:r>
+            <a:endParaRPr sz="3300" b="1" i="0" u="none">
+              <a:solidFill>
+                <a:srgbClr val="FFFFFF"/>
+              </a:solidFill>
+              <a:latin typeface="Poppins"/>
+            </a:endParaRPr>
+          </a:p>
+        </p:txBody>
+      </p:sp>
+      <p:sp>
+        <p:nvSpPr>
+          <p:cNvPr id="9" name="Rectangle 8"/>
+          <p:cNvSpPr/>
+          <p:nvPr/>
+        </p:nvSpPr>
+        <p:spPr>
+          <a:xfrm>
+            <a:off x="571500" y="571500"/>
+            <a:ext cx="57150" cy="619125"/>
+          </a:xfrm>
+          <a:prstGeom prst="rect">
+            <a:avLst/>
+          </a:prstGeom>
+          <a:solidFill>
+            <a:srgbClr val="F97316"/>
+          </a:solidFill>
+          <a:ln>
+            <a:noFill/>
+          </a:ln>
+          <a:effectLst/>
+        </p:spPr>
+        <p:style>
+          <a:lnRef idx="1">
+            <a:schemeClr val="accent1"/>
+          </a:lnRef>
+          <a:fillRef idx="3">
+            <a:schemeClr val="accent1"/>
+          </a:fillRef>
+          <a:effectRef idx="2">
+            <a:schemeClr val="accent1"/>
+          </a:effectRef>
+          <a:fontRef idx="minor">
+            <a:schemeClr val="lt1"/>
+          </a:fontRef>
+        </p:style>
+        <p:txBody>
+          <a:bodyPr rtlCol="0" anchor="ctr"/>
+          <a:lstStyle/>
+          <a:p>
+            <a:pPr algn="ctr"/>
+          </a:p>
+        </p:txBody>
+      </p:sp>
+    </p:spTree>
+  </p:cSld>
+  <p:clrMapOvr>
+    <a:masterClrMapping/>
+  </p:clrMapOvr>
+</p:sld>
+</file>
+
+<file path=ppt/slides/slide4.xml><?xml version="1.0" encoding="utf-8"?>
+<p:sld xmlns:a="http://schemas.openxmlformats.org/drawingml/2006/main" xmlns:r="http://schemas.openxmlformats.org/officeDocument/2006/relationships" xmlns:p="http://schemas.openxmlformats.org/presentationml/2006/main">
+  <p:cSld>
+    <p:bg>
+      <p:bgPr>
+        <a:solidFill>
+          <a:srgbClr val="0F172A"/>
+        </a:solidFill>
+        <a:effectLst/>
+      </p:bgPr>
+    </p:bg>
+    <p:spTree>
+      <p:nvGrpSpPr>
+        <p:cNvPr id="1" name=""/>
+        <p:cNvGrpSpPr/>
+        <p:nvPr/>
+      </p:nvGrpSpPr>
+      <p:grpSpPr/>
+      <p:pic>
+        <p:nvPicPr>
+          <p:cNvPr id="2" name="Picture 1" descr="image.png"/>
+          <p:cNvPicPr>
+            <a:picLocks noChangeAspect="1"/>
+          </p:cNvPicPr>
+          <p:nvPr/>
+        </p:nvPicPr>
+        <p:blipFill>
+          <a:blip r:embed="rId1"/>
+          <a:stretch>
+            <a:fillRect/>
+          </a:stretch>
+        </p:blipFill>
+        <p:spPr>
+          <a:xfrm>
+            <a:off x="0" y="0"/>
+            <a:ext cx="12192000" cy="6858000"/>
+          </a:xfrm>
+          <a:prstGeom prst="rect">
+            <a:avLst/>
+          </a:prstGeom>
+        </p:spPr>
+      </p:pic>
+      <p:pic>
+        <p:nvPicPr>
+          <p:cNvPr id="3" name="Picture 2" descr="image.png"/>
+          <p:cNvPicPr>
+            <a:picLocks noChangeAspect="1"/>
+          </p:cNvPicPr>
+          <p:nvPr/>
+        </p:nvPicPr>
+        <p:blipFill>
+          <a:blip r:embed="rId2"/>
+          <a:stretch>
+            <a:fillRect/>
+          </a:stretch>
+        </p:blipFill>
+        <p:spPr>
+          <a:xfrm>
+            <a:off x="571500" y="1976437"/>
+            <a:ext cx="3492549" cy="3905250"/>
+          </a:xfrm>
+          <a:prstGeom prst="rect">
+            <a:avLst/>
+          </a:prstGeom>
+        </p:spPr>
+      </p:pic>
+      <p:pic>
+        <p:nvPicPr>
+          <p:cNvPr id="4" name="Picture 3" descr="image.png"/>
+          <p:cNvPicPr>
+            <a:picLocks noChangeAspect="1"/>
+          </p:cNvPicPr>
+          <p:nvPr/>
+        </p:nvPicPr>
+        <p:blipFill>
+          <a:blip r:embed="rId3"/>
+          <a:stretch>
+            <a:fillRect/>
+          </a:stretch>
+        </p:blipFill>
+        <p:spPr>
+          <a:xfrm>
+            <a:off x="4349799" y="1976437"/>
+            <a:ext cx="3492549" cy="3905250"/>
+          </a:xfrm>
+          <a:prstGeom prst="rect">
+            <a:avLst/>
+          </a:prstGeom>
+        </p:spPr>
+      </p:pic>
+      <p:pic>
+        <p:nvPicPr>
+          <p:cNvPr id="5" name="Picture 4" descr="image.png"/>
+          <p:cNvPicPr>
+            <a:picLocks noChangeAspect="1"/>
+          </p:cNvPicPr>
+          <p:nvPr/>
+        </p:nvPicPr>
+        <p:blipFill>
+          <a:blip r:embed="rId4"/>
+          <a:stretch>
+            <a:fillRect/>
+          </a:stretch>
+        </p:blipFill>
+        <p:spPr>
+          <a:xfrm>
+            <a:off x="8128099" y="1976437"/>
+            <a:ext cx="3492549" cy="3905250"/>
+          </a:xfrm>
+          <a:prstGeom prst="rect">
+            <a:avLst/>
+          </a:prstGeom>
+        </p:spPr>
+      </p:pic>
+      <p:sp>
+        <p:nvSpPr>
+          <p:cNvPr id="6" name="TextBox 5"/>
+          <p:cNvSpPr txBox="1"/>
+          <p:nvPr/>
+        </p:nvSpPr>
+        <p:spPr>
+          <a:xfrm>
+            <a:off x="962025" y="3186112"/>
+            <a:ext cx="2847074" cy="400050"/>
+          </a:xfrm>
+          <a:prstGeom prst="rect">
+            <a:avLst/>
+          </a:prstGeom>
+          <a:noFill/>
+        </p:spPr>
+        <p:txBody>
+          <a:bodyPr wrap="square" lIns="0" tIns="0" rIns="0" bIns="0" anchor="t">
+            <a:spAutoFit/>
+          </a:bodyPr>
+          <a:lstStyle/>
+          <a:p>
+            <a:pPr algn="l"/>
+            <a:r>
+              <a:rPr sz="2100" b="1" i="0" u="none">
+                <a:solidFill>
+                  <a:srgbClr val="22C55E"/>
+                </a:solidFill>
+                <a:latin typeface="Poppins"/>
+              </a:rPr>
+              <a:t>Suivre</a:t>
+            </a:r>
+            <a:endParaRPr sz="2100" b="1" i="0" u="none">
+              <a:solidFill>
+                <a:srgbClr val="22C55E"/>
+              </a:solidFill>
+              <a:latin typeface="Poppins"/>
+            </a:endParaRPr>
+          </a:p>
+        </p:txBody>
+      </p:sp>
+      <p:sp>
+        <p:nvSpPr>
+          <p:cNvPr id="7" name="TextBox 6"/>
+          <p:cNvSpPr txBox="1"/>
+          <p:nvPr/>
+        </p:nvSpPr>
+        <p:spPr>
+          <a:xfrm>
+            <a:off x="962025" y="3776662"/>
+            <a:ext cx="2711499" cy="1219200"/>
+          </a:xfrm>
+          <a:prstGeom prst="rect">
+            <a:avLst/>
+          </a:prstGeom>
+          <a:noFill/>
+        </p:spPr>
+        <p:txBody>
+          <a:bodyPr wrap="square" lIns="0" tIns="0" rIns="0" bIns="0" anchor="t">
+            <a:spAutoFit/>
+          </a:bodyPr>
+          <a:lstStyle/>
+          <a:p>
+            <a:pPr algn="l">
+              <a:lnSpc>
+                <a:spcPts val="2400"/>
+              </a:lnSpc>
+            </a:pPr>
+            <a:r>
+              <a:rPr sz="1500" b="0" i="0" u="none">
+                <a:solidFill>
+                  <a:srgbClr val="CBD5E1"/>
+                </a:solidFill>
+                <a:latin typeface="Urbanist"/>
+              </a:rPr>
+              <a:t>Monitorer la consommation en temps réel pour identifier les postes les plus énergivores de votre installation.</a:t>
+            </a:r>
+            <a:endParaRPr sz="1500" b="0" i="0" u="none">
+              <a:solidFill>
+                <a:srgbClr val="CBD5E1"/>
+              </a:solidFill>
+              <a:latin typeface="Urbanist"/>
+            </a:endParaRPr>
+          </a:p>
+        </p:txBody>
+      </p:sp>
+      <p:sp>
+        <p:nvSpPr>
+          <p:cNvPr id="8" name="TextBox 7"/>
+          <p:cNvSpPr txBox="1"/>
+          <p:nvPr/>
+        </p:nvSpPr>
+        <p:spPr>
+          <a:xfrm>
+            <a:off x="4740324" y="3186112"/>
+            <a:ext cx="2847074" cy="400050"/>
+          </a:xfrm>
+          <a:prstGeom prst="rect">
+            <a:avLst/>
+          </a:prstGeom>
+          <a:noFill/>
+        </p:spPr>
+        <p:txBody>
+          <a:bodyPr wrap="square" lIns="0" tIns="0" rIns="0" bIns="0" anchor="t">
+            <a:spAutoFit/>
+          </a:bodyPr>
+          <a:lstStyle/>
+          <a:p>
+            <a:pPr algn="l"/>
+            <a:r>
+              <a:rPr sz="2100" b="1" i="0" u="none">
+                <a:solidFill>
+                  <a:srgbClr val="22C55E"/>
+                </a:solidFill>
+                <a:latin typeface="Poppins"/>
+              </a:rPr>
+              <a:t>Comprendre</a:t>
+            </a:r>
+            <a:endParaRPr sz="2100" b="1" i="0" u="none">
+              <a:solidFill>
+                <a:srgbClr val="22C55E"/>
+              </a:solidFill>
+              <a:latin typeface="Poppins"/>
+            </a:endParaRPr>
+          </a:p>
+        </p:txBody>
+      </p:sp>
+      <p:sp>
+        <p:nvSpPr>
+          <p:cNvPr id="9" name="TextBox 8"/>
+          <p:cNvSpPr txBox="1"/>
+          <p:nvPr/>
+        </p:nvSpPr>
+        <p:spPr>
+          <a:xfrm>
+            <a:off x="4740324" y="3776662"/>
+            <a:ext cx="2711499" cy="1219200"/>
+          </a:xfrm>
+          <a:prstGeom prst="rect">
+            <a:avLst/>
+          </a:prstGeom>
+          <a:noFill/>
+        </p:spPr>
+        <p:txBody>
+          <a:bodyPr wrap="square" lIns="0" tIns="0" rIns="0" bIns="0" anchor="t">
+            <a:spAutoFit/>
+          </a:bodyPr>
+          <a:lstStyle/>
+          <a:p>
+            <a:pPr algn="l">
+              <a:lnSpc>
+                <a:spcPts val="2400"/>
+              </a:lnSpc>
+            </a:pPr>
+            <a:r>
+              <a:rPr sz="1500" b="0" i="0" u="none">
+                <a:solidFill>
+                  <a:srgbClr val="CBD5E1"/>
+                </a:solidFill>
+                <a:latin typeface="Urbanist"/>
+              </a:rPr>
+              <a:t>Déchiffrer vos factures grâce à des analyses sémantiques et visuelles simplifiées, accessibles à tous.</a:t>
+            </a:r>
+            <a:endParaRPr sz="1500" b="0" i="0" u="none">
+              <a:solidFill>
+                <a:srgbClr val="CBD5E1"/>
+              </a:solidFill>
+              <a:latin typeface="Urbanist"/>
+            </a:endParaRPr>
+          </a:p>
+        </p:txBody>
+      </p:sp>
+      <p:sp>
+        <p:nvSpPr>
+          <p:cNvPr id="10" name="TextBox 9"/>
+          <p:cNvSpPr txBox="1"/>
+          <p:nvPr/>
+        </p:nvSpPr>
+        <p:spPr>
+          <a:xfrm>
+            <a:off x="8518624" y="3186112"/>
+            <a:ext cx="2847074" cy="400050"/>
+          </a:xfrm>
+          <a:prstGeom prst="rect">
+            <a:avLst/>
+          </a:prstGeom>
+          <a:noFill/>
+        </p:spPr>
+        <p:txBody>
+          <a:bodyPr wrap="square" lIns="0" tIns="0" rIns="0" bIns="0" anchor="t">
+            <a:spAutoFit/>
+          </a:bodyPr>
+          <a:lstStyle/>
+          <a:p>
+            <a:pPr algn="l"/>
+            <a:r>
+              <a:rPr sz="2100" b="1" i="0" u="none">
+                <a:solidFill>
+                  <a:srgbClr val="22C55E"/>
+                </a:solidFill>
+                <a:latin typeface="Poppins"/>
+              </a:rPr>
+              <a:t>Optimiser</a:t>
+            </a:r>
+            <a:endParaRPr sz="2100" b="1" i="0" u="none">
+              <a:solidFill>
+                <a:srgbClr val="22C55E"/>
+              </a:solidFill>
+              <a:latin typeface="Poppins"/>
+            </a:endParaRPr>
+          </a:p>
+        </p:txBody>
+      </p:sp>
+      <p:sp>
+        <p:nvSpPr>
+          <p:cNvPr id="11" name="TextBox 10"/>
+          <p:cNvSpPr txBox="1"/>
+          <p:nvPr/>
+        </p:nvSpPr>
+        <p:spPr>
+          <a:xfrm>
+            <a:off x="8518624" y="3776662"/>
+            <a:ext cx="2711499" cy="1524000"/>
+          </a:xfrm>
+          <a:prstGeom prst="rect">
+            <a:avLst/>
+          </a:prstGeom>
+          <a:noFill/>
+        </p:spPr>
+        <p:txBody>
+          <a:bodyPr wrap="square" lIns="0" tIns="0" rIns="0" bIns="0" anchor="t">
+            <a:spAutoFit/>
+          </a:bodyPr>
+          <a:lstStyle/>
+          <a:p>
+            <a:pPr algn="l">
+              <a:lnSpc>
+                <a:spcPts val="2400"/>
+              </a:lnSpc>
+            </a:pPr>
+            <a:r>
+              <a:rPr sz="1500" b="0" i="0" u="none">
+                <a:solidFill>
+                  <a:srgbClr val="CBD5E1"/>
+                </a:solidFill>
+                <a:latin typeface="Urbanist"/>
+              </a:rPr>
+              <a:t>Exploiter la puissance de l'IA pour recevoir des recommandations personnalisées et réduire vos dépenses.</a:t>
+            </a:r>
+            <a:endParaRPr sz="1500" b="0" i="0" u="none">
+              <a:solidFill>
+                <a:srgbClr val="CBD5E1"/>
+              </a:solidFill>
+              <a:latin typeface="Urbanist"/>
+            </a:endParaRPr>
+          </a:p>
+        </p:txBody>
+      </p:sp>
+      <p:pic>
+        <p:nvPicPr>
+          <p:cNvPr id="12" name="Picture 11" descr="image.png"/>
+          <p:cNvPicPr>
+            <a:picLocks noChangeAspect="1"/>
+          </p:cNvPicPr>
+          <p:nvPr/>
+        </p:nvPicPr>
+        <p:blipFill>
+          <a:blip r:embed="rId5"/>
+          <a:stretch>
+            <a:fillRect/>
+          </a:stretch>
+        </p:blipFill>
+        <p:spPr>
+          <a:xfrm>
+            <a:off x="962025" y="2405062"/>
+            <a:ext cx="476250" cy="476250"/>
+          </a:xfrm>
+          <a:prstGeom prst="rect">
+            <a:avLst/>
+          </a:prstGeom>
+        </p:spPr>
+      </p:pic>
+      <p:pic>
+        <p:nvPicPr>
+          <p:cNvPr id="13" name="Picture 12" descr="image.png"/>
+          <p:cNvPicPr>
+            <a:picLocks noChangeAspect="1"/>
+          </p:cNvPicPr>
+          <p:nvPr/>
+        </p:nvPicPr>
+        <p:blipFill>
+          <a:blip r:embed="rId6"/>
+          <a:stretch>
+            <a:fillRect/>
+          </a:stretch>
+        </p:blipFill>
+        <p:spPr>
+          <a:xfrm>
+            <a:off x="4740324" y="2405062"/>
+            <a:ext cx="476250" cy="476250"/>
+          </a:xfrm>
+          <a:prstGeom prst="rect">
+            <a:avLst/>
+          </a:prstGeom>
+        </p:spPr>
+      </p:pic>
+      <p:pic>
+        <p:nvPicPr>
+          <p:cNvPr id="14" name="Picture 13" descr="image.png"/>
+          <p:cNvPicPr>
+            <a:picLocks noChangeAspect="1"/>
+          </p:cNvPicPr>
+          <p:nvPr/>
+        </p:nvPicPr>
+        <p:blipFill>
+          <a:blip r:embed="rId7"/>
+          <a:stretch>
+            <a:fillRect/>
+          </a:stretch>
+        </p:blipFill>
+        <p:spPr>
+          <a:xfrm>
+            <a:off x="8518624" y="2405062"/>
+            <a:ext cx="533400" cy="476250"/>
+          </a:xfrm>
+          <a:prstGeom prst="rect">
+            <a:avLst/>
+          </a:prstGeom>
+        </p:spPr>
+      </p:pic>
+      <p:sp>
+        <p:nvSpPr>
+          <p:cNvPr id="15" name="TextBox 14"/>
+          <p:cNvSpPr txBox="1"/>
+          <p:nvPr/>
+        </p:nvSpPr>
+        <p:spPr>
+          <a:xfrm>
+            <a:off x="762000" y="571500"/>
+            <a:ext cx="11401425" cy="619125"/>
+          </a:xfrm>
+          <a:prstGeom prst="rect">
+            <a:avLst/>
+          </a:prstGeom>
+          <a:noFill/>
+        </p:spPr>
+        <p:txBody>
+          <a:bodyPr wrap="square" lIns="0" tIns="0" rIns="0" bIns="0" anchor="t">
+            <a:spAutoFit/>
+          </a:bodyPr>
+          <a:lstStyle/>
+          <a:p>
+            <a:pPr algn="l"/>
+            <a:r>
+              <a:rPr sz="3300" b="1" i="0" u="none">
+                <a:solidFill>
+                  <a:srgbClr val="FFFFFF"/>
+                </a:solidFill>
+                <a:latin typeface="Poppins"/>
+              </a:rPr>
+              <a:t>NOS OBJECTIFS STRATÉGIQUES</a:t>
+            </a:r>
+            <a:endParaRPr sz="3300" b="1" i="0" u="none">
+              <a:solidFill>
+                <a:srgbClr val="FFFFFF"/>
+              </a:solidFill>
+              <a:latin typeface="Poppins"/>
+            </a:endParaRPr>
+          </a:p>
+        </p:txBody>
+      </p:sp>
+      <p:sp>
+        <p:nvSpPr>
+          <p:cNvPr id="16" name="Rectangle 15"/>
+          <p:cNvSpPr/>
+          <p:nvPr/>
+        </p:nvSpPr>
+        <p:spPr>
+          <a:xfrm>
+            <a:off x="571500" y="571500"/>
+            <a:ext cx="57150" cy="619125"/>
+          </a:xfrm>
+          <a:prstGeom prst="rect">
+            <a:avLst/>
+          </a:prstGeom>
+          <a:solidFill>
+            <a:srgbClr val="F97316"/>
+          </a:solidFill>
+          <a:ln>
+            <a:noFill/>
+          </a:ln>
+          <a:effectLst/>
+        </p:spPr>
+        <p:style>
+          <a:lnRef idx="1">
+            <a:schemeClr val="accent1"/>
+          </a:lnRef>
+          <a:fillRef idx="3">
+            <a:schemeClr val="accent1"/>
+          </a:fillRef>
+          <a:effectRef idx="2">
+            <a:schemeClr val="accent1"/>
+          </a:effectRef>
+          <a:fontRef idx="minor">
+            <a:schemeClr val="lt1"/>
+          </a:fontRef>
+        </p:style>
+        <p:txBody>
+          <a:bodyPr rtlCol="0" anchor="ctr"/>
+          <a:lstStyle/>
+          <a:p>
+            <a:pPr algn="ctr"/>
+          </a:p>
+        </p:txBody>
+      </p:sp>
+    </p:spTree>
+  </p:cSld>
+  <p:clrMapOvr>
+    <a:masterClrMapping/>
+  </p:clrMapOvr>
+</p:sld>
+</file>
+
+<file path=ppt/slides/slide5.xml><?xml version="1.0" encoding="utf-8"?>
+<p:sld xmlns:a="http://schemas.openxmlformats.org/drawingml/2006/main" xmlns:r="http://schemas.openxmlformats.org/officeDocument/2006/relationships" xmlns:p="http://schemas.openxmlformats.org/presentationml/2006/main">
+  <p:cSld>
+    <p:bg>
+      <p:bgPr>
+        <a:solidFill>
+          <a:srgbClr val="0F172A"/>
+        </a:solidFill>
+        <a:effectLst/>
+      </p:bgPr>
+    </p:bg>
+    <p:spTree>
+      <p:nvGrpSpPr>
+        <p:cNvPr id="1" name=""/>
+        <p:cNvGrpSpPr/>
+        <p:nvPr/>
+      </p:nvGrpSpPr>
+      <p:grpSpPr/>
+      <p:pic>
+        <p:nvPicPr>
+          <p:cNvPr id="2" name="Picture 1" descr="image.png"/>
+          <p:cNvPicPr>
+            <a:picLocks noChangeAspect="1"/>
+          </p:cNvPicPr>
+          <p:nvPr/>
+        </p:nvPicPr>
+        <p:blipFill>
+          <a:blip r:embed="rId1"/>
+          <a:stretch>
+            <a:fillRect/>
+          </a:stretch>
+        </p:blipFill>
+        <p:spPr>
+          <a:xfrm>
+            <a:off x="0" y="0"/>
+            <a:ext cx="12192000" cy="6858000"/>
+          </a:xfrm>
+          <a:prstGeom prst="rect">
+            <a:avLst/>
+          </a:prstGeom>
+        </p:spPr>
+      </p:pic>
+      <p:sp>
+        <p:nvSpPr>
+          <p:cNvPr id="3" name="TextBox 2"/>
+          <p:cNvSpPr txBox="1"/>
+          <p:nvPr/>
+        </p:nvSpPr>
+        <p:spPr>
+          <a:xfrm>
+            <a:off x="762000" y="571500"/>
+            <a:ext cx="5000625" cy="1238250"/>
+          </a:xfrm>
+          <a:prstGeom prst="rect">
+            <a:avLst/>
+          </a:prstGeom>
+          <a:noFill/>
+        </p:spPr>
+        <p:txBody>
+          <a:bodyPr wrap="square" lIns="0" tIns="0" rIns="0" bIns="0" anchor="t">
+            <a:spAutoFit/>
+          </a:bodyPr>
+          <a:lstStyle/>
+          <a:p>
+            <a:pPr algn="l"/>
+            <a:r>
+              <a:rPr sz="3300" b="1" i="0" u="none">
+                <a:solidFill>
+                  <a:srgbClr val="FFFFFF"/>
+                </a:solidFill>
+                <a:latin typeface="Poppins"/>
+              </a:rPr>
+              <a:t>LA SOLUTION ANGOVO</a:t>
+            </a:r>
+            <a:endParaRPr sz="3300" b="1" i="0" u="none">
+              <a:solidFill>
+                <a:srgbClr val="FFFFFF"/>
+              </a:solidFill>
+              <a:latin typeface="Poppins"/>
+            </a:endParaRPr>
+          </a:p>
+        </p:txBody>
+      </p:sp>
+      <p:sp>
+        <p:nvSpPr>
+          <p:cNvPr id="4" name="Rectangle 3"/>
+          <p:cNvSpPr/>
+          <p:nvPr/>
+        </p:nvSpPr>
+        <p:spPr>
+          <a:xfrm>
+            <a:off x="571500" y="571500"/>
+            <a:ext cx="57150" cy="1238250"/>
+          </a:xfrm>
+          <a:prstGeom prst="rect">
+            <a:avLst/>
+          </a:prstGeom>
+          <a:solidFill>
+            <a:srgbClr val="F97316"/>
+          </a:solidFill>
+          <a:ln>
+            <a:noFill/>
+          </a:ln>
+          <a:effectLst/>
+        </p:spPr>
+        <p:style>
+          <a:lnRef idx="1">
+            <a:schemeClr val="accent1"/>
+          </a:lnRef>
+          <a:fillRef idx="3">
+            <a:schemeClr val="accent1"/>
+          </a:fillRef>
+          <a:effectRef idx="2">
+            <a:schemeClr val="accent1"/>
+          </a:effectRef>
+          <a:fontRef idx="minor">
+            <a:schemeClr val="lt1"/>
+          </a:fontRef>
+        </p:style>
+        <p:txBody>
+          <a:bodyPr rtlCol="0" anchor="ctr"/>
+          <a:lstStyle/>
+          <a:p>
+            <a:pPr algn="ctr"/>
+          </a:p>
+        </p:txBody>
+      </p:sp>
+      <p:pic>
+        <p:nvPicPr>
+          <p:cNvPr id="5" name="Picture 4" descr="image.png"/>
+          <p:cNvPicPr>
+            <a:picLocks noChangeAspect="1"/>
+          </p:cNvPicPr>
+          <p:nvPr/>
+        </p:nvPicPr>
+        <p:blipFill>
+          <a:blip r:embed="rId2"/>
+          <a:stretch>
+            <a:fillRect/>
+          </a:stretch>
+        </p:blipFill>
+        <p:spPr>
+          <a:xfrm>
+            <a:off x="6096000" y="0"/>
+            <a:ext cx="6096000" cy="6858000"/>
+          </a:xfrm>
+          <a:prstGeom prst="rect">
+            <a:avLst/>
+          </a:prstGeom>
+        </p:spPr>
+      </p:pic>
+      <p:sp>
+        <p:nvSpPr>
+          <p:cNvPr id="6" name="TextBox 5"/>
+          <p:cNvSpPr txBox="1"/>
+          <p:nvPr/>
+        </p:nvSpPr>
+        <p:spPr>
+          <a:xfrm>
+            <a:off x="571500" y="2190750"/>
+            <a:ext cx="5200650" cy="276225"/>
+          </a:xfrm>
+          <a:prstGeom prst="rect">
+            <a:avLst/>
+          </a:prstGeom>
+          <a:noFill/>
+        </p:spPr>
+        <p:txBody>
+          <a:bodyPr wrap="square" lIns="0" tIns="0" rIns="0" bIns="0" anchor="t">
+            <a:spAutoFit/>
+          </a:bodyPr>
+          <a:lstStyle/>
+          <a:p>
+            <a:pPr algn="l"/>
+            <a:r>
+              <a:rPr sz="1405" b="1" i="0" u="none">
+                <a:solidFill>
+                  <a:srgbClr val="22C55E"/>
+                </a:solidFill>
+                <a:latin typeface="Poppins"/>
+              </a:rPr>
+              <a:t>L'Intelligence Artificielle au Service du Réseau</a:t>
+            </a:r>
+            <a:endParaRPr sz="1405" b="1" i="0" u="none">
+              <a:solidFill>
+                <a:srgbClr val="22C55E"/>
+              </a:solidFill>
+              <a:latin typeface="Poppins"/>
+            </a:endParaRPr>
+          </a:p>
+        </p:txBody>
+      </p:sp>
+      <p:sp>
+        <p:nvSpPr>
+          <p:cNvPr id="7" name="TextBox 6"/>
+          <p:cNvSpPr txBox="1"/>
+          <p:nvPr/>
+        </p:nvSpPr>
+        <p:spPr>
+          <a:xfrm>
+            <a:off x="571500" y="2657475"/>
+            <a:ext cx="4953000" cy="1219200"/>
+          </a:xfrm>
+          <a:prstGeom prst="rect">
+            <a:avLst/>
+          </a:prstGeom>
+          <a:noFill/>
+        </p:spPr>
+        <p:txBody>
+          <a:bodyPr wrap="square" lIns="0" tIns="0" rIns="0" bIns="0" anchor="t">
+            <a:spAutoFit/>
+          </a:bodyPr>
+          <a:lstStyle/>
+          <a:p>
+            <a:pPr algn="l">
+              <a:lnSpc>
+                <a:spcPts val="2400"/>
+              </a:lnSpc>
+            </a:pPr>
+            <a:r>
+              <a:rPr sz="1500" b="0" i="0" u="none">
+                <a:solidFill>
+                  <a:srgbClr val="CBD5E1"/>
+                </a:solidFill>
+                <a:latin typeface="Urbanist"/>
+              </a:rPr>
+              <a:t>ANGOVO centralise l'ensemble de vos flux de données énergétiques. Notre algorithme propriétaire analyse vos habitudes et détecte les anomalies avant même qu'elles n'impactent votre facture.</a:t>
+            </a:r>
+            <a:endParaRPr sz="1500" b="0" i="0" u="none">
+              <a:solidFill>
+                <a:srgbClr val="CBD5E1"/>
+              </a:solidFill>
+              <a:latin typeface="Urbanist"/>
+            </a:endParaRPr>
+          </a:p>
+        </p:txBody>
+      </p:sp>
+      <p:sp>
+        <p:nvSpPr>
+          <p:cNvPr id="8" name="TextBox 7"/>
+          <p:cNvSpPr txBox="1"/>
+          <p:nvPr/>
+        </p:nvSpPr>
+        <p:spPr>
+          <a:xfrm>
+            <a:off x="571500" y="4257675"/>
+            <a:ext cx="4953000" cy="609600"/>
+          </a:xfrm>
+          <a:prstGeom prst="rect">
+            <a:avLst/>
+          </a:prstGeom>
+          <a:noFill/>
+        </p:spPr>
+        <p:txBody>
+          <a:bodyPr wrap="square" lIns="0" tIns="0" rIns="0" bIns="0" anchor="t">
+            <a:spAutoFit/>
+          </a:bodyPr>
+          <a:lstStyle/>
+          <a:p>
+            <a:pPr algn="l">
+              <a:lnSpc>
+                <a:spcPts val="2400"/>
+              </a:lnSpc>
+            </a:pPr>
+            <a:r>
+              <a:rPr sz="1500" b="0" i="0" u="none">
+                <a:solidFill>
+                  <a:srgbClr val="CBD5E1"/>
+                </a:solidFill>
+                <a:latin typeface="Urbanist"/>
+              </a:rPr>
+              <a:t>Une solution logicielle robuste, sécurisée et évolutive conçue pour répondre aux défis spécifiques du marché local.</a:t>
+            </a:r>
+            <a:endParaRPr sz="1500" b="0" i="0" u="none">
+              <a:solidFill>
+                <a:srgbClr val="CBD5E1"/>
+              </a:solidFill>
+              <a:latin typeface="Urbanist"/>
+            </a:endParaRPr>
+          </a:p>
+        </p:txBody>
+      </p:sp>
+    </p:spTree>
+  </p:cSld>
+  <p:clrMapOvr>
+    <a:masterClrMapping/>
+  </p:clrMapOvr>
+</p:sld>
+</file>
+
+<file path=ppt/slides/slide6.xml><?xml version="1.0" encoding="utf-8"?>
+<p:sld xmlns:a="http://schemas.openxmlformats.org/drawingml/2006/main" xmlns:r="http://schemas.openxmlformats.org/officeDocument/2006/relationships" xmlns:p="http://schemas.openxmlformats.org/presentationml/2006/main">
+  <p:cSld>
+    <p:bg>
+      <p:bgPr>
+        <a:solidFill>
+          <a:srgbClr val="0F172A"/>
+        </a:solidFill>
+        <a:effectLst/>
+      </p:bgPr>
+    </p:bg>
+    <p:spTree>
+      <p:nvGrpSpPr>
+        <p:cNvPr id="1" name=""/>
+        <p:cNvGrpSpPr/>
+        <p:nvPr/>
+      </p:nvGrpSpPr>
+      <p:grpSpPr/>
+      <p:pic>
+        <p:nvPicPr>
+          <p:cNvPr id="2" name="Picture 1" descr="image.png"/>
+          <p:cNvPicPr>
+            <a:picLocks noChangeAspect="1"/>
+          </p:cNvPicPr>
+          <p:nvPr/>
+        </p:nvPicPr>
+        <p:blipFill>
+          <a:blip r:embed="rId1"/>
+          <a:stretch>
+            <a:fillRect/>
+          </a:stretch>
+        </p:blipFill>
+        <p:spPr>
+          <a:xfrm>
+            <a:off x="0" y="0"/>
+            <a:ext cx="12192000" cy="6858000"/>
+          </a:xfrm>
+          <a:prstGeom prst="rect">
+            <a:avLst/>
+          </a:prstGeom>
+        </p:spPr>
+      </p:pic>
+      <p:pic>
+        <p:nvPicPr>
+          <p:cNvPr id="3" name="Picture 2" descr="image.png"/>
+          <p:cNvPicPr>
+            <a:picLocks noChangeAspect="1"/>
+          </p:cNvPicPr>
+          <p:nvPr/>
+        </p:nvPicPr>
+        <p:blipFill>
+          <a:blip r:embed="rId2"/>
+          <a:stretch>
+            <a:fillRect/>
+          </a:stretch>
+        </p:blipFill>
+        <p:spPr>
+          <a:xfrm>
+            <a:off x="571500" y="3348037"/>
+            <a:ext cx="11049000" cy="19050"/>
+          </a:xfrm>
+          <a:prstGeom prst="rect">
+            <a:avLst/>
+          </a:prstGeom>
+        </p:spPr>
+      </p:pic>
+      <p:sp>
+        <p:nvSpPr>
+          <p:cNvPr id="4" name="TextBox 3"/>
+          <p:cNvSpPr txBox="1"/>
+          <p:nvPr/>
+        </p:nvSpPr>
+        <p:spPr>
+          <a:xfrm>
+            <a:off x="571500" y="5238750"/>
+            <a:ext cx="11049000" cy="304800"/>
+          </a:xfrm>
+          <a:prstGeom prst="rect">
+            <a:avLst/>
+          </a:prstGeom>
+          <a:noFill/>
+        </p:spPr>
+        <p:txBody>
+          <a:bodyPr wrap="square" lIns="0" tIns="0" rIns="0" bIns="0" anchor="t">
+            <a:spAutoFit/>
+          </a:bodyPr>
+          <a:lstStyle/>
+          <a:p>
+            <a:pPr algn="ctr">
+              <a:lnSpc>
+                <a:spcPts val="2400"/>
+              </a:lnSpc>
+            </a:pPr>
+            <a:r>
+              <a:rPr sz="1500" b="0" i="1" u="none">
+                <a:solidFill>
+                  <a:srgbClr val="94A3B8"/>
+                </a:solidFill>
+                <a:latin typeface="Urbanist"/>
+              </a:rPr>
+              <a:t>Une démonstration live est disponible sur demande pour explorer chaque module.</a:t>
+            </a:r>
+            <a:endParaRPr sz="1500" b="0" i="1" u="none">
+              <a:solidFill>
+                <a:srgbClr val="94A3B8"/>
+              </a:solidFill>
+              <a:latin typeface="Urbanist"/>
+            </a:endParaRPr>
+          </a:p>
+        </p:txBody>
+      </p:sp>
+      <p:sp>
+        <p:nvSpPr>
+          <p:cNvPr id="5" name="Rounded Rectangle 4"/>
+          <p:cNvSpPr/>
+          <p:nvPr/>
+        </p:nvSpPr>
+        <p:spPr>
+          <a:xfrm>
+            <a:off x="1672530" y="2505075"/>
+            <a:ext cx="228600" cy="228600"/>
+          </a:xfrm>
+          <a:prstGeom prst="roundRect">
+            <a:avLst>
+              <a:gd name="adj" fmla="val 50000"/>
+            </a:avLst>
+          </a:prstGeom>
+          <a:solidFill>
+            <a:srgbClr val="0F172A"/>
+          </a:solidFill>
+          <a:ln w="38100">
+            <a:solidFill>
+              <a:srgbClr val="F97316"/>
+            </a:solidFill>
+          </a:ln>
+          <a:effectLst/>
+        </p:spPr>
+        <p:style>
+          <a:lnRef idx="1">
+            <a:schemeClr val="accent1"/>
+          </a:lnRef>
+          <a:fillRef idx="3">
+            <a:schemeClr val="accent1"/>
+          </a:fillRef>
+          <a:effectRef idx="2">
+            <a:schemeClr val="accent1"/>
+          </a:effectRef>
+          <a:fontRef idx="minor">
+            <a:schemeClr val="lt1"/>
+          </a:fontRef>
+        </p:style>
+        <p:txBody>
+          <a:bodyPr rtlCol="0" anchor="ctr"/>
+          <a:lstStyle/>
+          <a:p>
+            <a:pPr algn="ctr"/>
+          </a:p>
+        </p:txBody>
+      </p:sp>
+      <p:sp>
+        <p:nvSpPr>
+          <p:cNvPr id="6" name="TextBox 5"/>
+          <p:cNvSpPr txBox="1"/>
+          <p:nvPr/>
+        </p:nvSpPr>
+        <p:spPr>
+          <a:xfrm>
+            <a:off x="510733" y="2924175"/>
+            <a:ext cx="2552193" cy="276225"/>
+          </a:xfrm>
+          <a:prstGeom prst="rect">
+            <a:avLst/>
+          </a:prstGeom>
+          <a:noFill/>
+        </p:spPr>
+        <p:txBody>
+          <a:bodyPr wrap="square" lIns="0" tIns="0" rIns="0" bIns="0" anchor="t">
+            <a:spAutoFit/>
+          </a:bodyPr>
+          <a:lstStyle/>
+          <a:p>
+            <a:pPr algn="ctr"/>
+            <a:r>
+              <a:rPr sz="1405" b="1" i="0" u="none">
+                <a:solidFill>
+                  <a:srgbClr val="FFFFFF"/>
+                </a:solidFill>
+                <a:latin typeface="Poppins"/>
+              </a:rPr>
+              <a:t>Connexion</a:t>
+            </a:r>
+            <a:endParaRPr sz="1405" b="1" i="0" u="none">
+              <a:solidFill>
+                <a:srgbClr val="FFFFFF"/>
+              </a:solidFill>
+              <a:latin typeface="Poppins"/>
+            </a:endParaRPr>
+          </a:p>
+        </p:txBody>
+      </p:sp>
+      <p:sp>
+        <p:nvSpPr>
+          <p:cNvPr id="7" name="TextBox 6"/>
+          <p:cNvSpPr txBox="1"/>
+          <p:nvPr/>
+        </p:nvSpPr>
+        <p:spPr>
+          <a:xfrm>
+            <a:off x="571500" y="3390900"/>
+            <a:ext cx="2430660" cy="609600"/>
+          </a:xfrm>
+          <a:prstGeom prst="rect">
+            <a:avLst/>
+          </a:prstGeom>
+          <a:noFill/>
+        </p:spPr>
+        <p:txBody>
+          <a:bodyPr wrap="square" lIns="0" tIns="0" rIns="0" bIns="0" anchor="t">
+            <a:spAutoFit/>
+          </a:bodyPr>
+          <a:lstStyle/>
+          <a:p>
+            <a:pPr algn="ctr">
+              <a:lnSpc>
+                <a:spcPts val="2400"/>
+              </a:lnSpc>
+            </a:pPr>
+            <a:r>
+              <a:rPr sz="1500" b="0" i="0" u="none">
+                <a:solidFill>
+                  <a:srgbClr val="CBD5E1"/>
+                </a:solidFill>
+                <a:latin typeface="Urbanist"/>
+              </a:rPr>
+              <a:t>Accès sécurisé à votre espace personnel.</a:t>
+            </a:r>
+            <a:endParaRPr sz="1500" b="0" i="0" u="none">
+              <a:solidFill>
+                <a:srgbClr val="CBD5E1"/>
+              </a:solidFill>
+              <a:latin typeface="Urbanist"/>
+            </a:endParaRPr>
+          </a:p>
+        </p:txBody>
+      </p:sp>
+      <p:sp>
+        <p:nvSpPr>
+          <p:cNvPr id="8" name="Rounded Rectangle 7"/>
+          <p:cNvSpPr/>
+          <p:nvPr/>
+        </p:nvSpPr>
+        <p:spPr>
+          <a:xfrm>
+            <a:off x="4545210" y="2505075"/>
+            <a:ext cx="228600" cy="228600"/>
+          </a:xfrm>
+          <a:prstGeom prst="roundRect">
+            <a:avLst>
+              <a:gd name="adj" fmla="val 50000"/>
+            </a:avLst>
+          </a:prstGeom>
+          <a:solidFill>
+            <a:srgbClr val="0F172A"/>
+          </a:solidFill>
+          <a:ln w="38100">
+            <a:solidFill>
+              <a:srgbClr val="F97316"/>
+            </a:solidFill>
+          </a:ln>
+          <a:effectLst/>
+        </p:spPr>
+        <p:style>
+          <a:lnRef idx="1">
+            <a:schemeClr val="accent1"/>
+          </a:lnRef>
+          <a:fillRef idx="3">
+            <a:schemeClr val="accent1"/>
+          </a:fillRef>
+          <a:effectRef idx="2">
+            <a:schemeClr val="accent1"/>
+          </a:effectRef>
+          <a:fontRef idx="minor">
+            <a:schemeClr val="lt1"/>
+          </a:fontRef>
+        </p:style>
+        <p:txBody>
+          <a:bodyPr rtlCol="0" anchor="ctr"/>
+          <a:lstStyle/>
+          <a:p>
+            <a:pPr algn="ctr"/>
+          </a:p>
+        </p:txBody>
+      </p:sp>
+      <p:sp>
+        <p:nvSpPr>
+          <p:cNvPr id="9" name="TextBox 8"/>
+          <p:cNvSpPr txBox="1"/>
+          <p:nvPr/>
+        </p:nvSpPr>
+        <p:spPr>
+          <a:xfrm>
+            <a:off x="3383413" y="2924175"/>
+            <a:ext cx="2552193" cy="276225"/>
+          </a:xfrm>
+          <a:prstGeom prst="rect">
+            <a:avLst/>
+          </a:prstGeom>
+          <a:noFill/>
+        </p:spPr>
+        <p:txBody>
+          <a:bodyPr wrap="square" lIns="0" tIns="0" rIns="0" bIns="0" anchor="t">
+            <a:spAutoFit/>
+          </a:bodyPr>
+          <a:lstStyle/>
+          <a:p>
+            <a:pPr algn="ctr"/>
+            <a:r>
+              <a:rPr sz="1405" b="1" i="0" u="none">
+                <a:solidFill>
+                  <a:srgbClr val="FFFFFF"/>
+                </a:solidFill>
+                <a:latin typeface="Poppins"/>
+              </a:rPr>
+              <a:t>Dashboard</a:t>
+            </a:r>
+            <a:endParaRPr sz="1405" b="1" i="0" u="none">
+              <a:solidFill>
+                <a:srgbClr val="FFFFFF"/>
+              </a:solidFill>
+              <a:latin typeface="Poppins"/>
+            </a:endParaRPr>
+          </a:p>
+        </p:txBody>
+      </p:sp>
+      <p:sp>
+        <p:nvSpPr>
+          <p:cNvPr id="10" name="TextBox 9"/>
+          <p:cNvSpPr txBox="1"/>
+          <p:nvPr/>
+        </p:nvSpPr>
+        <p:spPr>
+          <a:xfrm>
+            <a:off x="3444180" y="3390900"/>
+            <a:ext cx="2430660" cy="609600"/>
+          </a:xfrm>
+          <a:prstGeom prst="rect">
+            <a:avLst/>
+          </a:prstGeom>
+          <a:noFill/>
+        </p:spPr>
+        <p:txBody>
+          <a:bodyPr wrap="square" lIns="0" tIns="0" rIns="0" bIns="0" anchor="t">
+            <a:spAutoFit/>
+          </a:bodyPr>
+          <a:lstStyle/>
+          <a:p>
+            <a:pPr algn="ctr">
+              <a:lnSpc>
+                <a:spcPts val="2400"/>
+              </a:lnSpc>
+            </a:pPr>
+            <a:r>
+              <a:rPr sz="1500" b="0" i="0" u="none">
+                <a:solidFill>
+                  <a:srgbClr val="CBD5E1"/>
+                </a:solidFill>
+                <a:latin typeface="Urbanist"/>
+              </a:rPr>
+              <a:t>Vue d'ensemble de vos indicateurs clés.</a:t>
+            </a:r>
+            <a:endParaRPr sz="1500" b="0" i="0" u="none">
+              <a:solidFill>
+                <a:srgbClr val="CBD5E1"/>
+              </a:solidFill>
+              <a:latin typeface="Urbanist"/>
+            </a:endParaRPr>
+          </a:p>
+        </p:txBody>
+      </p:sp>
+      <p:sp>
+        <p:nvSpPr>
+          <p:cNvPr id="11" name="Rounded Rectangle 10"/>
+          <p:cNvSpPr/>
+          <p:nvPr/>
+        </p:nvSpPr>
+        <p:spPr>
+          <a:xfrm>
+            <a:off x="7417891" y="2505075"/>
+            <a:ext cx="228600" cy="228600"/>
+          </a:xfrm>
+          <a:prstGeom prst="roundRect">
+            <a:avLst>
+              <a:gd name="adj" fmla="val 50000"/>
+            </a:avLst>
+          </a:prstGeom>
+          <a:solidFill>
+            <a:srgbClr val="0F172A"/>
+          </a:solidFill>
+          <a:ln w="38100">
+            <a:solidFill>
+              <a:srgbClr val="F97316"/>
+            </a:solidFill>
+          </a:ln>
+          <a:effectLst/>
+        </p:spPr>
+        <p:style>
+          <a:lnRef idx="1">
+            <a:schemeClr val="accent1"/>
+          </a:lnRef>
+          <a:fillRef idx="3">
+            <a:schemeClr val="accent1"/>
+          </a:fillRef>
+          <a:effectRef idx="2">
+            <a:schemeClr val="accent1"/>
+          </a:effectRef>
+          <a:fontRef idx="minor">
+            <a:schemeClr val="lt1"/>
+          </a:fontRef>
+        </p:style>
+        <p:txBody>
+          <a:bodyPr rtlCol="0" anchor="ctr"/>
+          <a:lstStyle/>
+          <a:p>
+            <a:pPr algn="ctr"/>
+          </a:p>
+        </p:txBody>
+      </p:sp>
+      <p:sp>
+        <p:nvSpPr>
+          <p:cNvPr id="12" name="TextBox 11"/>
+          <p:cNvSpPr txBox="1"/>
+          <p:nvPr/>
+        </p:nvSpPr>
+        <p:spPr>
+          <a:xfrm>
+            <a:off x="6256094" y="2924175"/>
+            <a:ext cx="2552193" cy="276225"/>
+          </a:xfrm>
+          <a:prstGeom prst="rect">
+            <a:avLst/>
+          </a:prstGeom>
+          <a:noFill/>
+        </p:spPr>
+        <p:txBody>
+          <a:bodyPr wrap="square" lIns="0" tIns="0" rIns="0" bIns="0" anchor="t">
+            <a:spAutoFit/>
+          </a:bodyPr>
+          <a:lstStyle/>
+          <a:p>
+            <a:pPr algn="ctr"/>
+            <a:r>
+              <a:rPr sz="1405" b="1" i="0" u="none">
+                <a:solidFill>
+                  <a:srgbClr val="FFFFFF"/>
+                </a:solidFill>
+                <a:latin typeface="Poppins"/>
+              </a:rPr>
+              <a:t>Analyse IA</a:t>
+            </a:r>
+            <a:endParaRPr sz="1405" b="1" i="0" u="none">
+              <a:solidFill>
+                <a:srgbClr val="FFFFFF"/>
+              </a:solidFill>
+              <a:latin typeface="Poppins"/>
+            </a:endParaRPr>
+          </a:p>
+        </p:txBody>
+      </p:sp>
+      <p:sp>
+        <p:nvSpPr>
+          <p:cNvPr id="13" name="TextBox 12"/>
+          <p:cNvSpPr txBox="1"/>
+          <p:nvPr/>
+        </p:nvSpPr>
+        <p:spPr>
+          <a:xfrm>
+            <a:off x="6316860" y="3390900"/>
+            <a:ext cx="2430660" cy="609600"/>
+          </a:xfrm>
+          <a:prstGeom prst="rect">
+            <a:avLst/>
+          </a:prstGeom>
+          <a:noFill/>
+        </p:spPr>
+        <p:txBody>
+          <a:bodyPr wrap="square" lIns="0" tIns="0" rIns="0" bIns="0" anchor="t">
+            <a:spAutoFit/>
+          </a:bodyPr>
+          <a:lstStyle/>
+          <a:p>
+            <a:pPr algn="ctr">
+              <a:lnSpc>
+                <a:spcPts val="2400"/>
+              </a:lnSpc>
+            </a:pPr>
+            <a:r>
+              <a:rPr sz="1500" b="0" i="0" u="none">
+                <a:solidFill>
+                  <a:srgbClr val="CBD5E1"/>
+                </a:solidFill>
+                <a:latin typeface="Urbanist"/>
+              </a:rPr>
+              <a:t>Interprétation de vos données complexes.</a:t>
+            </a:r>
+            <a:endParaRPr sz="1500" b="0" i="0" u="none">
+              <a:solidFill>
+                <a:srgbClr val="CBD5E1"/>
+              </a:solidFill>
+              <a:latin typeface="Urbanist"/>
+            </a:endParaRPr>
+          </a:p>
+        </p:txBody>
+      </p:sp>
+      <p:sp>
+        <p:nvSpPr>
+          <p:cNvPr id="14" name="Rounded Rectangle 13"/>
+          <p:cNvSpPr/>
+          <p:nvPr/>
+        </p:nvSpPr>
+        <p:spPr>
+          <a:xfrm>
+            <a:off x="10290571" y="2505075"/>
+            <a:ext cx="228600" cy="228600"/>
+          </a:xfrm>
+          <a:prstGeom prst="roundRect">
+            <a:avLst>
+              <a:gd name="adj" fmla="val 50000"/>
+            </a:avLst>
+          </a:prstGeom>
+          <a:solidFill>
+            <a:srgbClr val="0F172A"/>
+          </a:solidFill>
+          <a:ln w="38100">
+            <a:solidFill>
+              <a:srgbClr val="22C55E"/>
+            </a:solidFill>
+          </a:ln>
+          <a:effectLst/>
+        </p:spPr>
+        <p:style>
+          <a:lnRef idx="1">
+            <a:schemeClr val="accent1"/>
+          </a:lnRef>
+          <a:fillRef idx="3">
+            <a:schemeClr val="accent1"/>
+          </a:fillRef>
+          <a:effectRef idx="2">
+            <a:schemeClr val="accent1"/>
+          </a:effectRef>
+          <a:fontRef idx="minor">
+            <a:schemeClr val="lt1"/>
+          </a:fontRef>
+        </p:style>
+        <p:txBody>
+          <a:bodyPr rtlCol="0" anchor="ctr"/>
+          <a:lstStyle/>
+          <a:p>
+            <a:pPr algn="ctr"/>
+          </a:p>
+        </p:txBody>
+      </p:sp>
+      <p:sp>
+        <p:nvSpPr>
+          <p:cNvPr id="15" name="TextBox 14"/>
+          <p:cNvSpPr txBox="1"/>
+          <p:nvPr/>
+        </p:nvSpPr>
+        <p:spPr>
+          <a:xfrm>
+            <a:off x="9128774" y="2924175"/>
+            <a:ext cx="2552193" cy="276225"/>
+          </a:xfrm>
+          <a:prstGeom prst="rect">
+            <a:avLst/>
+          </a:prstGeom>
+          <a:noFill/>
+        </p:spPr>
+        <p:txBody>
+          <a:bodyPr wrap="square" lIns="0" tIns="0" rIns="0" bIns="0" anchor="t">
+            <a:spAutoFit/>
+          </a:bodyPr>
+          <a:lstStyle/>
+          <a:p>
+            <a:pPr algn="ctr"/>
+            <a:r>
+              <a:rPr sz="1405" b="1" i="0" u="none">
+                <a:solidFill>
+                  <a:srgbClr val="FFFFFF"/>
+                </a:solidFill>
+                <a:latin typeface="Poppins"/>
+              </a:rPr>
+              <a:t>Optimisation</a:t>
+            </a:r>
+            <a:endParaRPr sz="1405" b="1" i="0" u="none">
+              <a:solidFill>
+                <a:srgbClr val="FFFFFF"/>
+              </a:solidFill>
+              <a:latin typeface="Poppins"/>
+            </a:endParaRPr>
+          </a:p>
+        </p:txBody>
+      </p:sp>
+      <p:sp>
+        <p:nvSpPr>
+          <p:cNvPr id="16" name="TextBox 15"/>
+          <p:cNvSpPr txBox="1"/>
+          <p:nvPr/>
+        </p:nvSpPr>
+        <p:spPr>
+          <a:xfrm>
+            <a:off x="9189541" y="3390900"/>
+            <a:ext cx="2430660" cy="609600"/>
+          </a:xfrm>
+          <a:prstGeom prst="rect">
+            <a:avLst/>
+          </a:prstGeom>
+          <a:noFill/>
+        </p:spPr>
+        <p:txBody>
+          <a:bodyPr wrap="square" lIns="0" tIns="0" rIns="0" bIns="0" anchor="t">
+            <a:spAutoFit/>
+          </a:bodyPr>
+          <a:lstStyle/>
+          <a:p>
+            <a:pPr algn="ctr">
+              <a:lnSpc>
+                <a:spcPts val="2400"/>
+              </a:lnSpc>
+            </a:pPr>
+            <a:r>
+              <a:rPr sz="1500" b="0" i="0" u="none">
+                <a:solidFill>
+                  <a:srgbClr val="CBD5E1"/>
+                </a:solidFill>
+                <a:latin typeface="Urbanist"/>
+              </a:rPr>
+              <a:t>Réduction active de votre consommation.</a:t>
+            </a:r>
+            <a:endParaRPr sz="1500" b="0" i="0" u="none">
+              <a:solidFill>
+                <a:srgbClr val="CBD5E1"/>
+              </a:solidFill>
+              <a:latin typeface="Urbanist"/>
+            </a:endParaRPr>
+          </a:p>
+        </p:txBody>
+      </p:sp>
+      <p:sp>
+        <p:nvSpPr>
+          <p:cNvPr id="17" name="TextBox 16"/>
+          <p:cNvSpPr txBox="1"/>
+          <p:nvPr/>
+        </p:nvSpPr>
+        <p:spPr>
+          <a:xfrm>
+            <a:off x="762000" y="571500"/>
+            <a:ext cx="11401425" cy="619125"/>
+          </a:xfrm>
+          <a:prstGeom prst="rect">
+            <a:avLst/>
+          </a:prstGeom>
+          <a:noFill/>
+        </p:spPr>
+        <p:txBody>
+          <a:bodyPr wrap="square" lIns="0" tIns="0" rIns="0" bIns="0" anchor="t">
+            <a:spAutoFit/>
+          </a:bodyPr>
+          <a:lstStyle/>
+          <a:p>
+            <a:pPr algn="l"/>
+            <a:r>
+              <a:rPr sz="3300" b="1" i="0" u="none">
+                <a:solidFill>
+                  <a:srgbClr val="FFFFFF"/>
+                </a:solidFill>
+                <a:latin typeface="Poppins"/>
+              </a:rPr>
+              <a:t>L'EXPÉRIENCE UTILISATEUR</a:t>
+            </a:r>
+            <a:endParaRPr sz="3300" b="1" i="0" u="none">
+              <a:solidFill>
+                <a:srgbClr val="FFFFFF"/>
+              </a:solidFill>
+              <a:latin typeface="Poppins"/>
+            </a:endParaRPr>
+          </a:p>
+        </p:txBody>
+      </p:sp>
+      <p:sp>
+        <p:nvSpPr>
+          <p:cNvPr id="18" name="Rectangle 17"/>
+          <p:cNvSpPr/>
+          <p:nvPr/>
+        </p:nvSpPr>
+        <p:spPr>
+          <a:xfrm>
+            <a:off x="571500" y="571500"/>
+            <a:ext cx="57150" cy="619125"/>
+          </a:xfrm>
+          <a:prstGeom prst="rect">
+            <a:avLst/>
+          </a:prstGeom>
+          <a:solidFill>
+            <a:srgbClr val="F97316"/>
+          </a:solidFill>
+          <a:ln>
+            <a:noFill/>
+          </a:ln>
+          <a:effectLst/>
+        </p:spPr>
+        <p:style>
+          <a:lnRef idx="1">
+            <a:schemeClr val="accent1"/>
+          </a:lnRef>
+          <a:fillRef idx="3">
+            <a:schemeClr val="accent1"/>
+          </a:fillRef>
+          <a:effectRef idx="2">
+            <a:schemeClr val="accent1"/>
+          </a:effectRef>
+          <a:fontRef idx="minor">
+            <a:schemeClr val="lt1"/>
+          </a:fontRef>
+        </p:style>
+        <p:txBody>
+          <a:bodyPr rtlCol="0" anchor="ctr"/>
+          <a:lstStyle/>
+          <a:p>
+            <a:pPr algn="ctr"/>
+          </a:p>
+        </p:txBody>
+      </p:sp>
+    </p:spTree>
+  </p:cSld>
+  <p:clrMapOvr>
+    <a:masterClrMapping/>
+  </p:clrMapOvr>
+</p:sld>
+</file>
+
+<file path=ppt/slides/slide7.xml><?xml version="1.0" encoding="utf-8"?>
 <p:sld xmlns:a="http://schemas.openxmlformats.org/drawingml/2006/main" xmlns:r="http://schemas.openxmlformats.org/officeDocument/2006/relationships" xmlns:p="http://schemas.openxmlformats.org/presentationml/2006/main">
   <p:cSld>
     <p:bg>
@@ -4175,2616 +6584,6 @@
 </p:sld>
 </file>
 
-<file path=ppt/slides/slide11.xml><?xml version="1.0" encoding="utf-8"?>
-<p:sld xmlns:a="http://schemas.openxmlformats.org/drawingml/2006/main" xmlns:r="http://schemas.openxmlformats.org/officeDocument/2006/relationships" xmlns:p="http://schemas.openxmlformats.org/presentationml/2006/main">
-  <p:cSld>
-    <p:bg>
-      <p:bgPr>
-        <a:solidFill>
-          <a:srgbClr val="0F172A"/>
-        </a:solidFill>
-        <a:effectLst/>
-      </p:bgPr>
-    </p:bg>
-    <p:spTree>
-      <p:nvGrpSpPr>
-        <p:cNvPr id="1" name=""/>
-        <p:cNvGrpSpPr/>
-        <p:nvPr/>
-      </p:nvGrpSpPr>
-      <p:grpSpPr/>
-      <p:pic>
-        <p:nvPicPr>
-          <p:cNvPr id="2" name="Picture 1" descr="image.png"/>
-          <p:cNvPicPr>
-            <a:picLocks noChangeAspect="1"/>
-          </p:cNvPicPr>
-          <p:nvPr/>
-        </p:nvPicPr>
-        <p:blipFill>
-          <a:blip r:embed="rId1"/>
-          <a:stretch>
-            <a:fillRect/>
-          </a:stretch>
-        </p:blipFill>
-        <p:spPr>
-          <a:xfrm>
-            <a:off x="0" y="0"/>
-            <a:ext cx="12192000" cy="6858000"/>
-          </a:xfrm>
-          <a:prstGeom prst="rect">
-            <a:avLst/>
-          </a:prstGeom>
-        </p:spPr>
-      </p:pic>
-      <p:pic>
-        <p:nvPicPr>
-          <p:cNvPr id="3" name="Picture 2" descr="image.png"/>
-          <p:cNvPicPr>
-            <a:picLocks noChangeAspect="1"/>
-          </p:cNvPicPr>
-          <p:nvPr/>
-        </p:nvPicPr>
-        <p:blipFill>
-          <a:blip r:embed="rId2"/>
-          <a:stretch>
-            <a:fillRect/>
-          </a:stretch>
-        </p:blipFill>
-        <p:spPr>
-          <a:xfrm>
-            <a:off x="5843587" y="1892647"/>
-            <a:ext cx="504825" cy="571500"/>
-          </a:xfrm>
-          <a:prstGeom prst="rect">
-            <a:avLst/>
-          </a:prstGeom>
-        </p:spPr>
-      </p:pic>
-      <p:sp>
-        <p:nvSpPr>
-          <p:cNvPr id="4" name="TextBox 3"/>
-          <p:cNvSpPr txBox="1"/>
-          <p:nvPr/>
-        </p:nvSpPr>
-        <p:spPr>
-          <a:xfrm>
-            <a:off x="2190750" y="3168997"/>
-            <a:ext cx="7810500" cy="1234380"/>
-          </a:xfrm>
-          <a:prstGeom prst="rect">
-            <a:avLst/>
-          </a:prstGeom>
-          <a:noFill/>
-        </p:spPr>
-        <p:txBody>
-          <a:bodyPr wrap="square" lIns="0" tIns="0" rIns="0" bIns="0" anchor="t">
-            <a:spAutoFit/>
-          </a:bodyPr>
-          <a:lstStyle/>
-          <a:p>
-            <a:pPr algn="ctr">
-              <a:lnSpc>
-                <a:spcPts val="4860"/>
-              </a:lnSpc>
-            </a:pPr>
-            <a:r>
-              <a:rPr sz="4050" b="0" i="1" u="none">
-                <a:solidFill>
-                  <a:srgbClr val="F8FAFC"/>
-                </a:solidFill>
-                <a:latin typeface="Urbanist Light"/>
-              </a:rPr>
-              <a:t> On ne peut pas gérer ce que l'on ne mesure pas. </a:t>
-            </a:r>
-            <a:endParaRPr sz="4050" b="0" i="1" u="none">
-              <a:solidFill>
-                <a:srgbClr val="F8FAFC"/>
-              </a:solidFill>
-              <a:latin typeface="Urbanist Light"/>
-            </a:endParaRPr>
-          </a:p>
-        </p:txBody>
-      </p:sp>
-    </p:spTree>
-  </p:cSld>
-  <p:clrMapOvr>
-    <a:masterClrMapping/>
-  </p:clrMapOvr>
-</p:sld>
-</file>
-
-<file path=ppt/slides/slide12.xml><?xml version="1.0" encoding="utf-8"?>
-<p:sld xmlns:a="http://schemas.openxmlformats.org/drawingml/2006/main" xmlns:r="http://schemas.openxmlformats.org/officeDocument/2006/relationships" xmlns:p="http://schemas.openxmlformats.org/presentationml/2006/main">
-  <p:cSld>
-    <p:bg>
-      <p:bgPr>
-        <a:solidFill>
-          <a:srgbClr val="0F172A"/>
-        </a:solidFill>
-        <a:effectLst/>
-      </p:bgPr>
-    </p:bg>
-    <p:spTree>
-      <p:nvGrpSpPr>
-        <p:cNvPr id="1" name=""/>
-        <p:cNvGrpSpPr/>
-        <p:nvPr/>
-      </p:nvGrpSpPr>
-      <p:grpSpPr/>
-      <p:sp>
-        <p:nvSpPr>
-          <p:cNvPr id="3" name="TextBox 2"/>
-          <p:cNvSpPr txBox="1"/>
-          <p:nvPr/>
-        </p:nvSpPr>
-        <p:spPr>
-          <a:xfrm>
-            <a:off x="4950856" y="1632644"/>
-            <a:ext cx="2290286" cy="1143000"/>
-          </a:xfrm>
-          <a:prstGeom prst="rect">
-            <a:avLst/>
-          </a:prstGeom>
-          <a:noFill/>
-        </p:spPr>
-        <p:txBody>
-          <a:bodyPr wrap="square" lIns="0" tIns="0" rIns="0" bIns="0" anchor="t">
-            <a:spAutoFit/>
-          </a:bodyPr>
-          <a:lstStyle/>
-          <a:p>
-            <a:pPr algn="ctr"/>
-            <a:r>
-              <a:rPr sz="6000" b="1" i="0" u="none">
-                <a:solidFill>
-                  <a:srgbClr val="FFFFFF"/>
-                </a:solidFill>
-                <a:latin typeface="Poppins"/>
-              </a:rPr>
-              <a:t>Merci</a:t>
-            </a:r>
-            <a:endParaRPr sz="6000" b="1" i="0" u="none">
-              <a:solidFill>
-                <a:srgbClr val="FFFFFF"/>
-              </a:solidFill>
-              <a:latin typeface="Poppins"/>
-            </a:endParaRPr>
-          </a:p>
-        </p:txBody>
-      </p:sp>
-      <p:sp>
-        <p:nvSpPr>
-          <p:cNvPr id="4" name="TextBox 3"/>
-          <p:cNvSpPr txBox="1"/>
-          <p:nvPr/>
-        </p:nvSpPr>
-        <p:spPr>
-          <a:xfrm>
-            <a:off x="4195762" y="3175694"/>
-            <a:ext cx="3800475" cy="487560"/>
-          </a:xfrm>
-          <a:prstGeom prst="rect">
-            <a:avLst/>
-          </a:prstGeom>
-          <a:noFill/>
-        </p:spPr>
-        <p:txBody>
-          <a:bodyPr wrap="square" lIns="0" tIns="0" rIns="0" bIns="0" anchor="t">
-            <a:spAutoFit/>
-          </a:bodyPr>
-          <a:lstStyle/>
-          <a:p>
-            <a:pPr algn="ctr">
-              <a:lnSpc>
-                <a:spcPts val="3840"/>
-              </a:lnSpc>
-            </a:pPr>
-            <a:r>
-              <a:rPr sz="2400" b="0" i="0" u="none">
-                <a:solidFill>
-                  <a:srgbClr val="F97316"/>
-                </a:solidFill>
-                <a:latin typeface="Urbanist SemiBold"/>
-              </a:rPr>
-              <a:t>L'énergie à portée de main.</a:t>
-            </a:r>
-            <a:endParaRPr sz="2400" b="0" i="0" u="none">
-              <a:solidFill>
-                <a:srgbClr val="F97316"/>
-              </a:solidFill>
-              <a:latin typeface="Urbanist SemiBold"/>
-            </a:endParaRPr>
-          </a:p>
-        </p:txBody>
-      </p:sp>
-    </p:spTree>
-  </p:cSld>
-  <p:clrMapOvr>
-    <a:masterClrMapping/>
-  </p:clrMapOvr>
-</p:sld>
-</file>
-
-<file path=ppt/slides/slide2.xml><?xml version="1.0" encoding="utf-8"?>
-<p:sld xmlns:a="http://schemas.openxmlformats.org/drawingml/2006/main" xmlns:r="http://schemas.openxmlformats.org/officeDocument/2006/relationships" xmlns:p="http://schemas.openxmlformats.org/presentationml/2006/main">
-  <p:cSld>
-    <p:bg>
-      <p:bgPr>
-        <a:solidFill>
-          <a:srgbClr val="0F172A"/>
-        </a:solidFill>
-        <a:effectLst/>
-      </p:bgPr>
-    </p:bg>
-    <p:spTree>
-      <p:nvGrpSpPr>
-        <p:cNvPr id="1" name=""/>
-        <p:cNvGrpSpPr/>
-        <p:nvPr/>
-      </p:nvGrpSpPr>
-      <p:grpSpPr/>
-      <p:pic>
-        <p:nvPicPr>
-          <p:cNvPr id="2" name="Picture 1" descr="image.png"/>
-          <p:cNvPicPr>
-            <a:picLocks noChangeAspect="1"/>
-          </p:cNvPicPr>
-          <p:nvPr/>
-        </p:nvPicPr>
-        <p:blipFill>
-          <a:blip r:embed="rId1"/>
-          <a:stretch>
-            <a:fillRect/>
-          </a:stretch>
-        </p:blipFill>
-        <p:spPr>
-          <a:xfrm>
-            <a:off x="0" y="0"/>
-            <a:ext cx="12192000" cy="6858000"/>
-          </a:xfrm>
-          <a:prstGeom prst="rect">
-            <a:avLst/>
-          </a:prstGeom>
-        </p:spPr>
-      </p:pic>
-      <p:pic>
-        <p:nvPicPr>
-          <p:cNvPr id="3" name="Picture 2" descr="image.png"/>
-          <p:cNvPicPr>
-            <a:picLocks noChangeAspect="1"/>
-          </p:cNvPicPr>
-          <p:nvPr/>
-        </p:nvPicPr>
-        <p:blipFill>
-          <a:blip r:embed="rId2"/>
-          <a:stretch>
-            <a:fillRect/>
-          </a:stretch>
-        </p:blipFill>
-        <p:spPr>
-          <a:xfrm>
-            <a:off x="5524500" y="1468784"/>
-            <a:ext cx="1143000" cy="1143000"/>
-          </a:xfrm>
-          <a:prstGeom prst="rect">
-            <a:avLst/>
-          </a:prstGeom>
-        </p:spPr>
-      </p:pic>
-      <p:sp>
-        <p:nvSpPr>
-          <p:cNvPr id="4" name="TextBox 3"/>
-          <p:cNvSpPr txBox="1"/>
-          <p:nvPr/>
-        </p:nvSpPr>
-        <p:spPr>
-          <a:xfrm>
-            <a:off x="2705576" y="2802284"/>
-            <a:ext cx="6780847" cy="1009650"/>
-          </a:xfrm>
-          <a:prstGeom prst="rect">
-            <a:avLst/>
-          </a:prstGeom>
-          <a:noFill/>
-        </p:spPr>
-        <p:txBody>
-          <a:bodyPr wrap="square" lIns="0" tIns="0" rIns="0" bIns="0" anchor="t">
-            <a:spAutoFit/>
-          </a:bodyPr>
-          <a:lstStyle/>
-          <a:p>
-            <a:pPr algn="ctr"/>
-            <a:r>
-              <a:rPr sz="5250" b="1" i="0" u="none">
-                <a:solidFill>
-                  <a:srgbClr val="FFFFFF"/>
-                </a:solidFill>
-                <a:latin typeface="Poppins"/>
-              </a:rPr>
-              <a:t>Le Défi Énergétique</a:t>
-            </a:r>
-            <a:endParaRPr sz="5250" b="1" i="0" u="none">
-              <a:solidFill>
-                <a:srgbClr val="FFFFFF"/>
-              </a:solidFill>
-              <a:latin typeface="Poppins"/>
-            </a:endParaRPr>
-          </a:p>
-        </p:txBody>
-      </p:sp>
-      <p:sp>
-        <p:nvSpPr>
-          <p:cNvPr id="5" name="TextBox 4"/>
-          <p:cNvSpPr txBox="1"/>
-          <p:nvPr/>
-        </p:nvSpPr>
-        <p:spPr>
-          <a:xfrm>
-            <a:off x="2286000" y="4269134"/>
-            <a:ext cx="7620000" cy="853380"/>
-          </a:xfrm>
-          <a:prstGeom prst="rect">
-            <a:avLst/>
-          </a:prstGeom>
-          <a:noFill/>
-        </p:spPr>
-        <p:txBody>
-          <a:bodyPr wrap="square" lIns="0" tIns="0" rIns="0" bIns="0" anchor="t">
-            <a:spAutoFit/>
-          </a:bodyPr>
-          <a:lstStyle/>
-          <a:p>
-            <a:pPr algn="ctr">
-              <a:lnSpc>
-                <a:spcPts val="3360"/>
-              </a:lnSpc>
-            </a:pPr>
-            <a:r>
-              <a:rPr sz="2100" b="0" i="0" u="none">
-                <a:solidFill>
-                  <a:srgbClr val="94A3B8"/>
-                </a:solidFill>
-                <a:latin typeface="Urbanist"/>
-              </a:rPr>
-              <a:t>Naviguer dans la complexité de la consommation moderne pour un avenir durable.</a:t>
-            </a:r>
-            <a:endParaRPr sz="2100" b="0" i="0" u="none">
-              <a:solidFill>
-                <a:srgbClr val="94A3B8"/>
-              </a:solidFill>
-              <a:latin typeface="Urbanist"/>
-            </a:endParaRPr>
-          </a:p>
-        </p:txBody>
-      </p:sp>
-      <p:pic>
-        <p:nvPicPr>
-          <p:cNvPr id="6" name="Picture 5" descr="image.png"/>
-          <p:cNvPicPr>
-            <a:picLocks noChangeAspect="1"/>
-          </p:cNvPicPr>
-          <p:nvPr/>
-        </p:nvPicPr>
-        <p:blipFill>
-          <a:blip r:embed="rId3"/>
-          <a:stretch>
-            <a:fillRect/>
-          </a:stretch>
-        </p:blipFill>
-        <p:spPr>
-          <a:xfrm>
-            <a:off x="5881687" y="1754534"/>
-            <a:ext cx="428625" cy="571500"/>
-          </a:xfrm>
-          <a:prstGeom prst="rect">
-            <a:avLst/>
-          </a:prstGeom>
-        </p:spPr>
-      </p:pic>
-    </p:spTree>
-  </p:cSld>
-  <p:clrMapOvr>
-    <a:masterClrMapping/>
-  </p:clrMapOvr>
-</p:sld>
-</file>
-
-<file path=ppt/slides/slide3.xml><?xml version="1.0" encoding="utf-8"?>
-<p:sld xmlns:a="http://schemas.openxmlformats.org/drawingml/2006/main" xmlns:r="http://schemas.openxmlformats.org/officeDocument/2006/relationships" xmlns:p="http://schemas.openxmlformats.org/presentationml/2006/main">
-  <p:cSld>
-    <p:bg>
-      <p:bgPr>
-        <a:solidFill>
-          <a:srgbClr val="0F172A"/>
-        </a:solidFill>
-        <a:effectLst/>
-      </p:bgPr>
-    </p:bg>
-    <p:spTree>
-      <p:nvGrpSpPr>
-        <p:cNvPr id="1" name=""/>
-        <p:cNvGrpSpPr/>
-        <p:nvPr/>
-      </p:nvGrpSpPr>
-      <p:grpSpPr/>
-      <p:pic>
-        <p:nvPicPr>
-          <p:cNvPr id="2" name="Picture 1" descr="image.png"/>
-          <p:cNvPicPr>
-            <a:picLocks noChangeAspect="1"/>
-          </p:cNvPicPr>
-          <p:nvPr/>
-        </p:nvPicPr>
-        <p:blipFill>
-          <a:blip r:embed="rId1"/>
-          <a:stretch>
-            <a:fillRect/>
-          </a:stretch>
-        </p:blipFill>
-        <p:spPr>
-          <a:xfrm>
-            <a:off x="0" y="0"/>
-            <a:ext cx="12192000" cy="6858000"/>
-          </a:xfrm>
-          <a:prstGeom prst="rect">
-            <a:avLst/>
-          </a:prstGeom>
-        </p:spPr>
-      </p:pic>
-      <p:pic>
-        <p:nvPicPr>
-          <p:cNvPr id="3" name="Picture 2" descr="image.png"/>
-          <p:cNvPicPr>
-            <a:picLocks noChangeAspect="1"/>
-          </p:cNvPicPr>
-          <p:nvPr/>
-        </p:nvPicPr>
-        <p:blipFill>
-          <a:blip r:embed="rId2"/>
-          <a:stretch>
-            <a:fillRect/>
-          </a:stretch>
-        </p:blipFill>
-        <p:spPr>
-          <a:xfrm>
-            <a:off x="571500" y="1776412"/>
-            <a:ext cx="3492549" cy="4305300"/>
-          </a:xfrm>
-          <a:prstGeom prst="rect">
-            <a:avLst/>
-          </a:prstGeom>
-        </p:spPr>
-      </p:pic>
-      <p:pic>
-        <p:nvPicPr>
-          <p:cNvPr id="4" name="Picture 3" descr="image.png"/>
-          <p:cNvPicPr>
-            <a:picLocks noChangeAspect="1"/>
-          </p:cNvPicPr>
-          <p:nvPr/>
-        </p:nvPicPr>
-        <p:blipFill>
-          <a:blip r:embed="rId3"/>
-          <a:stretch>
-            <a:fillRect/>
-          </a:stretch>
-        </p:blipFill>
-        <p:spPr>
-          <a:xfrm>
-            <a:off x="4349799" y="1776412"/>
-            <a:ext cx="3492549" cy="4305300"/>
-          </a:xfrm>
-          <a:prstGeom prst="rect">
-            <a:avLst/>
-          </a:prstGeom>
-        </p:spPr>
-      </p:pic>
-      <p:pic>
-        <p:nvPicPr>
-          <p:cNvPr id="5" name="Picture 4" descr="image.png"/>
-          <p:cNvPicPr>
-            <a:picLocks noChangeAspect="1"/>
-          </p:cNvPicPr>
-          <p:nvPr/>
-        </p:nvPicPr>
-        <p:blipFill>
-          <a:blip r:embed="rId4"/>
-          <a:stretch>
-            <a:fillRect/>
-          </a:stretch>
-        </p:blipFill>
-        <p:spPr>
-          <a:xfrm>
-            <a:off x="8128099" y="1776412"/>
-            <a:ext cx="3492549" cy="4305300"/>
-          </a:xfrm>
-          <a:prstGeom prst="rect">
-            <a:avLst/>
-          </a:prstGeom>
-        </p:spPr>
-      </p:pic>
-      <p:sp>
-        <p:nvSpPr>
-          <p:cNvPr id="6" name="TextBox 5"/>
-          <p:cNvSpPr txBox="1"/>
-          <p:nvPr/>
-        </p:nvSpPr>
-        <p:spPr>
-          <a:xfrm>
-            <a:off x="962025" y="2986087"/>
-            <a:ext cx="2847074" cy="400050"/>
-          </a:xfrm>
-          <a:prstGeom prst="rect">
-            <a:avLst/>
-          </a:prstGeom>
-          <a:noFill/>
-        </p:spPr>
-        <p:txBody>
-          <a:bodyPr wrap="square" lIns="0" tIns="0" rIns="0" bIns="0" anchor="t">
-            <a:spAutoFit/>
-          </a:bodyPr>
-          <a:lstStyle/>
-          <a:p>
-            <a:pPr algn="l"/>
-            <a:r>
-              <a:rPr sz="2100" b="1" i="0" u="none">
-                <a:solidFill>
-                  <a:srgbClr val="22C55E"/>
-                </a:solidFill>
-                <a:latin typeface="Poppins"/>
-              </a:rPr>
-              <a:t>Factures Opaques</a:t>
-            </a:r>
-            <a:endParaRPr sz="2100" b="1" i="0" u="none">
-              <a:solidFill>
-                <a:srgbClr val="22C55E"/>
-              </a:solidFill>
-              <a:latin typeface="Poppins"/>
-            </a:endParaRPr>
-          </a:p>
-        </p:txBody>
-      </p:sp>
-      <p:sp>
-        <p:nvSpPr>
-          <p:cNvPr id="7" name="TextBox 6"/>
-          <p:cNvSpPr txBox="1"/>
-          <p:nvPr/>
-        </p:nvSpPr>
-        <p:spPr>
-          <a:xfrm>
-            <a:off x="962025" y="3576637"/>
-            <a:ext cx="2711499" cy="1524000"/>
-          </a:xfrm>
-          <a:prstGeom prst="rect">
-            <a:avLst/>
-          </a:prstGeom>
-          <a:noFill/>
-        </p:spPr>
-        <p:txBody>
-          <a:bodyPr wrap="square" lIns="0" tIns="0" rIns="0" bIns="0" anchor="t">
-            <a:spAutoFit/>
-          </a:bodyPr>
-          <a:lstStyle/>
-          <a:p>
-            <a:pPr algn="l">
-              <a:lnSpc>
-                <a:spcPts val="2400"/>
-              </a:lnSpc>
-            </a:pPr>
-            <a:r>
-              <a:rPr sz="1500" b="0" i="0" u="none">
-                <a:solidFill>
-                  <a:srgbClr val="CBD5E1"/>
-                </a:solidFill>
-                <a:latin typeface="Urbanist"/>
-              </a:rPr>
-              <a:t>Des relevés complexes et difficiles à interpréter, empêchant toute visibilité sur la répartition des coûts réels au sein du foyer.</a:t>
-            </a:r>
-            <a:endParaRPr sz="1500" b="0" i="0" u="none">
-              <a:solidFill>
-                <a:srgbClr val="CBD5E1"/>
-              </a:solidFill>
-              <a:latin typeface="Urbanist"/>
-            </a:endParaRPr>
-          </a:p>
-        </p:txBody>
-      </p:sp>
-      <p:sp>
-        <p:nvSpPr>
-          <p:cNvPr id="8" name="TextBox 7"/>
-          <p:cNvSpPr txBox="1"/>
-          <p:nvPr/>
-        </p:nvSpPr>
-        <p:spPr>
-          <a:xfrm>
-            <a:off x="4740324" y="2986087"/>
-            <a:ext cx="2847074" cy="400050"/>
-          </a:xfrm>
-          <a:prstGeom prst="rect">
-            <a:avLst/>
-          </a:prstGeom>
-          <a:noFill/>
-        </p:spPr>
-        <p:txBody>
-          <a:bodyPr wrap="square" lIns="0" tIns="0" rIns="0" bIns="0" anchor="t">
-            <a:spAutoFit/>
-          </a:bodyPr>
-          <a:lstStyle/>
-          <a:p>
-            <a:pPr algn="l"/>
-            <a:r>
-              <a:rPr sz="2100" b="1" i="0" u="none">
-                <a:solidFill>
-                  <a:srgbClr val="22C55E"/>
-                </a:solidFill>
-                <a:latin typeface="Poppins"/>
-              </a:rPr>
-              <a:t>Suivi Impossible</a:t>
-            </a:r>
-            <a:endParaRPr sz="2100" b="1" i="0" u="none">
-              <a:solidFill>
-                <a:srgbClr val="22C55E"/>
-              </a:solidFill>
-              <a:latin typeface="Poppins"/>
-            </a:endParaRPr>
-          </a:p>
-        </p:txBody>
-      </p:sp>
-      <p:sp>
-        <p:nvSpPr>
-          <p:cNvPr id="9" name="TextBox 8"/>
-          <p:cNvSpPr txBox="1"/>
-          <p:nvPr/>
-        </p:nvSpPr>
-        <p:spPr>
-          <a:xfrm>
-            <a:off x="4740324" y="3576637"/>
-            <a:ext cx="2711499" cy="1524000"/>
-          </a:xfrm>
-          <a:prstGeom prst="rect">
-            <a:avLst/>
-          </a:prstGeom>
-          <a:noFill/>
-        </p:spPr>
-        <p:txBody>
-          <a:bodyPr wrap="square" lIns="0" tIns="0" rIns="0" bIns="0" anchor="t">
-            <a:spAutoFit/>
-          </a:bodyPr>
-          <a:lstStyle/>
-          <a:p>
-            <a:pPr algn="l">
-              <a:lnSpc>
-                <a:spcPts val="2400"/>
-              </a:lnSpc>
-            </a:pPr>
-            <a:r>
-              <a:rPr sz="1500" b="0" i="0" u="none">
-                <a:solidFill>
-                  <a:srgbClr val="CBD5E1"/>
-                </a:solidFill>
-                <a:latin typeface="Urbanist"/>
-              </a:rPr>
-              <a:t>L'absence d'outils de monitoring en temps réel rend la gestion de la consommation quotidienne purement réactive et inefficace.</a:t>
-            </a:r>
-            <a:endParaRPr sz="1500" b="0" i="0" u="none">
-              <a:solidFill>
-                <a:srgbClr val="CBD5E1"/>
-              </a:solidFill>
-              <a:latin typeface="Urbanist"/>
-            </a:endParaRPr>
-          </a:p>
-        </p:txBody>
-      </p:sp>
-      <p:sp>
-        <p:nvSpPr>
-          <p:cNvPr id="10" name="TextBox 9"/>
-          <p:cNvSpPr txBox="1"/>
-          <p:nvPr/>
-        </p:nvSpPr>
-        <p:spPr>
-          <a:xfrm>
-            <a:off x="8518624" y="2986087"/>
-            <a:ext cx="2847074" cy="800100"/>
-          </a:xfrm>
-          <a:prstGeom prst="rect">
-            <a:avLst/>
-          </a:prstGeom>
-          <a:noFill/>
-        </p:spPr>
-        <p:txBody>
-          <a:bodyPr wrap="square" lIns="0" tIns="0" rIns="0" bIns="0" anchor="t">
-            <a:spAutoFit/>
-          </a:bodyPr>
-          <a:lstStyle/>
-          <a:p>
-            <a:pPr algn="l"/>
-            <a:r>
-              <a:rPr sz="2100" b="1" i="0" u="none">
-                <a:solidFill>
-                  <a:srgbClr val="22C55E"/>
-                </a:solidFill>
-                <a:latin typeface="Poppins"/>
-              </a:rPr>
-              <a:t>Dépenses Imprévues</a:t>
-            </a:r>
-            <a:endParaRPr sz="2100" b="1" i="0" u="none">
-              <a:solidFill>
-                <a:srgbClr val="22C55E"/>
-              </a:solidFill>
-              <a:latin typeface="Poppins"/>
-            </a:endParaRPr>
-          </a:p>
-        </p:txBody>
-      </p:sp>
-      <p:sp>
-        <p:nvSpPr>
-          <p:cNvPr id="11" name="TextBox 10"/>
-          <p:cNvSpPr txBox="1"/>
-          <p:nvPr/>
-        </p:nvSpPr>
-        <p:spPr>
-          <a:xfrm>
-            <a:off x="8518624" y="3976687"/>
-            <a:ext cx="2711499" cy="1524000"/>
-          </a:xfrm>
-          <a:prstGeom prst="rect">
-            <a:avLst/>
-          </a:prstGeom>
-          <a:noFill/>
-        </p:spPr>
-        <p:txBody>
-          <a:bodyPr wrap="square" lIns="0" tIns="0" rIns="0" bIns="0" anchor="t">
-            <a:spAutoFit/>
-          </a:bodyPr>
-          <a:lstStyle/>
-          <a:p>
-            <a:pPr algn="l">
-              <a:lnSpc>
-                <a:spcPts val="2400"/>
-              </a:lnSpc>
-            </a:pPr>
-            <a:r>
-              <a:rPr sz="1500" b="0" i="0" u="none">
-                <a:solidFill>
-                  <a:srgbClr val="CBD5E1"/>
-                </a:solidFill>
-                <a:latin typeface="Urbanist"/>
-              </a:rPr>
-              <a:t>Des pics de consommation non détectés entraînant des surcoûts majeurs et une instabilité budgétaire pour les familles.</a:t>
-            </a:r>
-            <a:endParaRPr sz="1500" b="0" i="0" u="none">
-              <a:solidFill>
-                <a:srgbClr val="CBD5E1"/>
-              </a:solidFill>
-              <a:latin typeface="Urbanist"/>
-            </a:endParaRPr>
-          </a:p>
-        </p:txBody>
-      </p:sp>
-      <p:pic>
-        <p:nvPicPr>
-          <p:cNvPr id="12" name="Picture 11" descr="image.png"/>
-          <p:cNvPicPr>
-            <a:picLocks noChangeAspect="1"/>
-          </p:cNvPicPr>
-          <p:nvPr/>
-        </p:nvPicPr>
-        <p:blipFill>
-          <a:blip r:embed="rId5"/>
-          <a:stretch>
-            <a:fillRect/>
-          </a:stretch>
-        </p:blipFill>
-        <p:spPr>
-          <a:xfrm>
-            <a:off x="962025" y="2205037"/>
-            <a:ext cx="361950" cy="476250"/>
-          </a:xfrm>
-          <a:prstGeom prst="rect">
-            <a:avLst/>
-          </a:prstGeom>
-        </p:spPr>
-      </p:pic>
-      <p:pic>
-        <p:nvPicPr>
-          <p:cNvPr id="13" name="Picture 12" descr="image.png"/>
-          <p:cNvPicPr>
-            <a:picLocks noChangeAspect="1"/>
-          </p:cNvPicPr>
-          <p:nvPr/>
-        </p:nvPicPr>
-        <p:blipFill>
-          <a:blip r:embed="rId6"/>
-          <a:stretch>
-            <a:fillRect/>
-          </a:stretch>
-        </p:blipFill>
-        <p:spPr>
-          <a:xfrm>
-            <a:off x="8518624" y="2205037"/>
-            <a:ext cx="476250" cy="476250"/>
-          </a:xfrm>
-          <a:prstGeom prst="rect">
-            <a:avLst/>
-          </a:prstGeom>
-        </p:spPr>
-      </p:pic>
-      <p:sp>
-        <p:nvSpPr>
-          <p:cNvPr id="14" name="TextBox 13"/>
-          <p:cNvSpPr txBox="1"/>
-          <p:nvPr/>
-        </p:nvSpPr>
-        <p:spPr>
-          <a:xfrm>
-            <a:off x="762000" y="571500"/>
-            <a:ext cx="11401425" cy="619125"/>
-          </a:xfrm>
-          <a:prstGeom prst="rect">
-            <a:avLst/>
-          </a:prstGeom>
-          <a:noFill/>
-        </p:spPr>
-        <p:txBody>
-          <a:bodyPr wrap="square" lIns="0" tIns="0" rIns="0" bIns="0" anchor="t">
-            <a:spAutoFit/>
-          </a:bodyPr>
-          <a:lstStyle/>
-          <a:p>
-            <a:pPr algn="l"/>
-            <a:r>
-              <a:rPr sz="3300" b="1" i="0" u="none">
-                <a:solidFill>
-                  <a:srgbClr val="FFFFFF"/>
-                </a:solidFill>
-                <a:latin typeface="Poppins"/>
-              </a:rPr>
-              <a:t>LA PROBLÉMATIQUE ACTUELLE</a:t>
-            </a:r>
-            <a:endParaRPr sz="3300" b="1" i="0" u="none">
-              <a:solidFill>
-                <a:srgbClr val="FFFFFF"/>
-              </a:solidFill>
-              <a:latin typeface="Poppins"/>
-            </a:endParaRPr>
-          </a:p>
-        </p:txBody>
-      </p:sp>
-      <p:sp>
-        <p:nvSpPr>
-          <p:cNvPr id="15" name="Rectangle 14"/>
-          <p:cNvSpPr/>
-          <p:nvPr/>
-        </p:nvSpPr>
-        <p:spPr>
-          <a:xfrm>
-            <a:off x="571500" y="571500"/>
-            <a:ext cx="57150" cy="619125"/>
-          </a:xfrm>
-          <a:prstGeom prst="rect">
-            <a:avLst/>
-          </a:prstGeom>
-          <a:solidFill>
-            <a:srgbClr val="F97316"/>
-          </a:solidFill>
-          <a:ln>
-            <a:noFill/>
-          </a:ln>
-          <a:effectLst/>
-        </p:spPr>
-        <p:style>
-          <a:lnRef idx="1">
-            <a:schemeClr val="accent1"/>
-          </a:lnRef>
-          <a:fillRef idx="3">
-            <a:schemeClr val="accent1"/>
-          </a:fillRef>
-          <a:effectRef idx="2">
-            <a:schemeClr val="accent1"/>
-          </a:effectRef>
-          <a:fontRef idx="minor">
-            <a:schemeClr val="lt1"/>
-          </a:fontRef>
-        </p:style>
-        <p:txBody>
-          <a:bodyPr rtlCol="0" anchor="ctr"/>
-          <a:lstStyle/>
-          <a:p>
-            <a:pPr algn="ctr"/>
-          </a:p>
-        </p:txBody>
-      </p:sp>
-    </p:spTree>
-  </p:cSld>
-  <p:clrMapOvr>
-    <a:masterClrMapping/>
-  </p:clrMapOvr>
-</p:sld>
-</file>
-
-<file path=ppt/slides/slide4.xml><?xml version="1.0" encoding="utf-8"?>
-<p:sld xmlns:a="http://schemas.openxmlformats.org/drawingml/2006/main" xmlns:r="http://schemas.openxmlformats.org/officeDocument/2006/relationships" xmlns:p="http://schemas.openxmlformats.org/presentationml/2006/main">
-  <p:cSld>
-    <p:bg>
-      <p:bgPr>
-        <a:solidFill>
-          <a:srgbClr val="0F172A"/>
-        </a:solidFill>
-        <a:effectLst/>
-      </p:bgPr>
-    </p:bg>
-    <p:spTree>
-      <p:nvGrpSpPr>
-        <p:cNvPr id="1" name=""/>
-        <p:cNvGrpSpPr/>
-        <p:nvPr/>
-      </p:nvGrpSpPr>
-      <p:grpSpPr/>
-      <p:pic>
-        <p:nvPicPr>
-          <p:cNvPr id="2" name="Picture 1" descr="image.png"/>
-          <p:cNvPicPr>
-            <a:picLocks noChangeAspect="1"/>
-          </p:cNvPicPr>
-          <p:nvPr/>
-        </p:nvPicPr>
-        <p:blipFill>
-          <a:blip r:embed="rId1"/>
-          <a:stretch>
-            <a:fillRect/>
-          </a:stretch>
-        </p:blipFill>
-        <p:spPr>
-          <a:xfrm>
-            <a:off x="0" y="0"/>
-            <a:ext cx="12192000" cy="6858000"/>
-          </a:xfrm>
-          <a:prstGeom prst="rect">
-            <a:avLst/>
-          </a:prstGeom>
-        </p:spPr>
-      </p:pic>
-      <p:pic>
-        <p:nvPicPr>
-          <p:cNvPr id="3" name="Picture 2" descr="image.png"/>
-          <p:cNvPicPr>
-            <a:picLocks noChangeAspect="1"/>
-          </p:cNvPicPr>
-          <p:nvPr/>
-        </p:nvPicPr>
-        <p:blipFill>
-          <a:blip r:embed="rId2"/>
-          <a:stretch>
-            <a:fillRect/>
-          </a:stretch>
-        </p:blipFill>
-        <p:spPr>
-          <a:xfrm>
-            <a:off x="6381750" y="1785937"/>
-            <a:ext cx="5238750" cy="4286250"/>
-          </a:xfrm>
-          <a:prstGeom prst="rect">
-            <a:avLst/>
-          </a:prstGeom>
-        </p:spPr>
-      </p:pic>
-      <p:sp>
-        <p:nvSpPr>
-          <p:cNvPr id="4" name="TextBox 3"/>
-          <p:cNvSpPr txBox="1"/>
-          <p:nvPr/>
-        </p:nvSpPr>
-        <p:spPr>
-          <a:xfrm>
-            <a:off x="571500" y="2052637"/>
-            <a:ext cx="5500687" cy="1047750"/>
-          </a:xfrm>
-          <a:prstGeom prst="rect">
-            <a:avLst/>
-          </a:prstGeom>
-          <a:noFill/>
-        </p:spPr>
-        <p:txBody>
-          <a:bodyPr wrap="square" lIns="0" tIns="0" rIns="0" bIns="0" anchor="t">
-            <a:spAutoFit/>
-          </a:bodyPr>
-          <a:lstStyle/>
-          <a:p>
-            <a:pPr algn="l"/>
-            <a:r>
-              <a:rPr sz="2700" b="1" i="0" u="none">
-                <a:solidFill>
-                  <a:srgbClr val="22C55E"/>
-                </a:solidFill>
-                <a:latin typeface="Poppins"/>
-              </a:rPr>
-              <a:t>Redonner le pouvoir aux utilisateurs</a:t>
-            </a:r>
-            <a:endParaRPr sz="2700" b="1" i="0" u="none">
-              <a:solidFill>
-                <a:srgbClr val="22C55E"/>
-              </a:solidFill>
-              <a:latin typeface="Poppins"/>
-            </a:endParaRPr>
-          </a:p>
-        </p:txBody>
-      </p:sp>
-      <p:sp>
-        <p:nvSpPr>
-          <p:cNvPr id="5" name="TextBox 4"/>
-          <p:cNvSpPr txBox="1"/>
-          <p:nvPr/>
-        </p:nvSpPr>
-        <p:spPr>
-          <a:xfrm>
-            <a:off x="571500" y="3290887"/>
-            <a:ext cx="5238750" cy="1524000"/>
-          </a:xfrm>
-          <a:prstGeom prst="rect">
-            <a:avLst/>
-          </a:prstGeom>
-          <a:noFill/>
-        </p:spPr>
-        <p:txBody>
-          <a:bodyPr wrap="square" lIns="0" tIns="0" rIns="0" bIns="0" anchor="t">
-            <a:spAutoFit/>
-          </a:bodyPr>
-          <a:lstStyle/>
-          <a:p>
-            <a:pPr algn="l">
-              <a:lnSpc>
-                <a:spcPts val="2400"/>
-              </a:lnSpc>
-            </a:pPr>
-            <a:r>
-              <a:rPr sz="1500" b="0" i="0" u="none">
-                <a:solidFill>
-                  <a:srgbClr val="CBD5E1"/>
-                </a:solidFill>
-                <a:latin typeface="Urbanist"/>
-              </a:rPr>
-              <a:t>Chez </a:t>
-            </a:r>
-            <a:r>
-              <a:rPr sz="1500" b="1" i="0" u="none">
-                <a:solidFill>
-                  <a:srgbClr val="CBD5E1"/>
-                </a:solidFill>
-                <a:latin typeface="Urbanist"/>
-              </a:rPr>
-              <a:t>ANGOVO</a:t>
-            </a:r>
-            <a:r>
-              <a:rPr sz="1500" b="0" i="0" u="none">
-                <a:solidFill>
-                  <a:srgbClr val="CBD5E1"/>
-                </a:solidFill>
-                <a:latin typeface="Urbanist"/>
-              </a:rPr>
-              <a:t>, nous croyons que la technologie doit simplifier la vie. Notre plateforme transforme les données brutes en informations exploitables, permettant à chaque foyer malgache de devenir acteur de sa propre transition énergétique.</a:t>
-            </a:r>
-            <a:endParaRPr sz="1500" b="0" i="0" u="none">
-              <a:solidFill>
-                <a:srgbClr val="CBD5E1"/>
-              </a:solidFill>
-              <a:latin typeface="Urbanist"/>
-            </a:endParaRPr>
-          </a:p>
-        </p:txBody>
-      </p:sp>
-      <p:sp>
-        <p:nvSpPr>
-          <p:cNvPr id="6" name="TextBox 5"/>
-          <p:cNvSpPr txBox="1"/>
-          <p:nvPr/>
-        </p:nvSpPr>
-        <p:spPr>
-          <a:xfrm>
-            <a:off x="571500" y="5005387"/>
-            <a:ext cx="5238750" cy="609600"/>
-          </a:xfrm>
-          <a:prstGeom prst="rect">
-            <a:avLst/>
-          </a:prstGeom>
-          <a:noFill/>
-        </p:spPr>
-        <p:txBody>
-          <a:bodyPr wrap="square" lIns="0" tIns="0" rIns="0" bIns="0" anchor="t">
-            <a:spAutoFit/>
-          </a:bodyPr>
-          <a:lstStyle/>
-          <a:p>
-            <a:pPr algn="l">
-              <a:lnSpc>
-                <a:spcPts val="2400"/>
-              </a:lnSpc>
-            </a:pPr>
-            <a:r>
-              <a:rPr sz="1500" b="0" i="0" u="none">
-                <a:solidFill>
-                  <a:srgbClr val="CBD5E1"/>
-                </a:solidFill>
-                <a:latin typeface="Urbanist"/>
-              </a:rPr>
-              <a:t>Grâce à une interface moderne et intuitive, gérez vos ressources comme jamais auparavant.</a:t>
-            </a:r>
-            <a:endParaRPr sz="1500" b="0" i="0" u="none">
-              <a:solidFill>
-                <a:srgbClr val="CBD5E1"/>
-              </a:solidFill>
-              <a:latin typeface="Urbanist"/>
-            </a:endParaRPr>
-          </a:p>
-        </p:txBody>
-      </p:sp>
-      <p:pic>
-        <p:nvPicPr>
-          <p:cNvPr id="7" name="Picture 6" descr="image.png"/>
-          <p:cNvPicPr>
-            <a:picLocks noChangeAspect="1"/>
-          </p:cNvPicPr>
-          <p:nvPr/>
-        </p:nvPicPr>
-        <p:blipFill>
-          <a:blip r:embed="rId3"/>
-          <a:stretch>
-            <a:fillRect/>
-          </a:stretch>
-        </p:blipFill>
-        <p:spPr>
-          <a:xfrm>
-            <a:off x="6391275" y="1795462"/>
-            <a:ext cx="5219700" cy="4267200"/>
-          </a:xfrm>
-          <a:prstGeom prst="rect">
-            <a:avLst/>
-          </a:prstGeom>
-        </p:spPr>
-      </p:pic>
-      <p:sp>
-        <p:nvSpPr>
-          <p:cNvPr id="8" name="TextBox 7"/>
-          <p:cNvSpPr txBox="1"/>
-          <p:nvPr/>
-        </p:nvSpPr>
-        <p:spPr>
-          <a:xfrm>
-            <a:off x="762000" y="571500"/>
-            <a:ext cx="11401425" cy="619125"/>
-          </a:xfrm>
-          <a:prstGeom prst="rect">
-            <a:avLst/>
-          </a:prstGeom>
-          <a:noFill/>
-        </p:spPr>
-        <p:txBody>
-          <a:bodyPr wrap="square" lIns="0" tIns="0" rIns="0" bIns="0" anchor="t">
-            <a:spAutoFit/>
-          </a:bodyPr>
-          <a:lstStyle/>
-          <a:p>
-            <a:pPr algn="l"/>
-            <a:r>
-              <a:rPr sz="3300" b="1" i="0" u="none">
-                <a:solidFill>
-                  <a:srgbClr val="FFFFFF"/>
-                </a:solidFill>
-                <a:latin typeface="Poppins"/>
-              </a:rPr>
-              <a:t>UNE VISION INTELLIGENTE</a:t>
-            </a:r>
-            <a:endParaRPr sz="3300" b="1" i="0" u="none">
-              <a:solidFill>
-                <a:srgbClr val="FFFFFF"/>
-              </a:solidFill>
-              <a:latin typeface="Poppins"/>
-            </a:endParaRPr>
-          </a:p>
-        </p:txBody>
-      </p:sp>
-      <p:sp>
-        <p:nvSpPr>
-          <p:cNvPr id="9" name="Rectangle 8"/>
-          <p:cNvSpPr/>
-          <p:nvPr/>
-        </p:nvSpPr>
-        <p:spPr>
-          <a:xfrm>
-            <a:off x="571500" y="571500"/>
-            <a:ext cx="57150" cy="619125"/>
-          </a:xfrm>
-          <a:prstGeom prst="rect">
-            <a:avLst/>
-          </a:prstGeom>
-          <a:solidFill>
-            <a:srgbClr val="F97316"/>
-          </a:solidFill>
-          <a:ln>
-            <a:noFill/>
-          </a:ln>
-          <a:effectLst/>
-        </p:spPr>
-        <p:style>
-          <a:lnRef idx="1">
-            <a:schemeClr val="accent1"/>
-          </a:lnRef>
-          <a:fillRef idx="3">
-            <a:schemeClr val="accent1"/>
-          </a:fillRef>
-          <a:effectRef idx="2">
-            <a:schemeClr val="accent1"/>
-          </a:effectRef>
-          <a:fontRef idx="minor">
-            <a:schemeClr val="lt1"/>
-          </a:fontRef>
-        </p:style>
-        <p:txBody>
-          <a:bodyPr rtlCol="0" anchor="ctr"/>
-          <a:lstStyle/>
-          <a:p>
-            <a:pPr algn="ctr"/>
-          </a:p>
-        </p:txBody>
-      </p:sp>
-    </p:spTree>
-  </p:cSld>
-  <p:clrMapOvr>
-    <a:masterClrMapping/>
-  </p:clrMapOvr>
-</p:sld>
-</file>
-
-<file path=ppt/slides/slide5.xml><?xml version="1.0" encoding="utf-8"?>
-<p:sld xmlns:a="http://schemas.openxmlformats.org/drawingml/2006/main" xmlns:r="http://schemas.openxmlformats.org/officeDocument/2006/relationships" xmlns:p="http://schemas.openxmlformats.org/presentationml/2006/main">
-  <p:cSld>
-    <p:bg>
-      <p:bgPr>
-        <a:solidFill>
-          <a:srgbClr val="0F172A"/>
-        </a:solidFill>
-        <a:effectLst/>
-      </p:bgPr>
-    </p:bg>
-    <p:spTree>
-      <p:nvGrpSpPr>
-        <p:cNvPr id="1" name=""/>
-        <p:cNvGrpSpPr/>
-        <p:nvPr/>
-      </p:nvGrpSpPr>
-      <p:grpSpPr/>
-      <p:pic>
-        <p:nvPicPr>
-          <p:cNvPr id="2" name="Picture 1" descr="image.png"/>
-          <p:cNvPicPr>
-            <a:picLocks noChangeAspect="1"/>
-          </p:cNvPicPr>
-          <p:nvPr/>
-        </p:nvPicPr>
-        <p:blipFill>
-          <a:blip r:embed="rId1"/>
-          <a:stretch>
-            <a:fillRect/>
-          </a:stretch>
-        </p:blipFill>
-        <p:spPr>
-          <a:xfrm>
-            <a:off x="0" y="0"/>
-            <a:ext cx="12192000" cy="6858000"/>
-          </a:xfrm>
-          <a:prstGeom prst="rect">
-            <a:avLst/>
-          </a:prstGeom>
-        </p:spPr>
-      </p:pic>
-      <p:pic>
-        <p:nvPicPr>
-          <p:cNvPr id="3" name="Picture 2" descr="image.png"/>
-          <p:cNvPicPr>
-            <a:picLocks noChangeAspect="1"/>
-          </p:cNvPicPr>
-          <p:nvPr/>
-        </p:nvPicPr>
-        <p:blipFill>
-          <a:blip r:embed="rId2"/>
-          <a:stretch>
-            <a:fillRect/>
-          </a:stretch>
-        </p:blipFill>
-        <p:spPr>
-          <a:xfrm>
-            <a:off x="571500" y="1976437"/>
-            <a:ext cx="3492549" cy="3905250"/>
-          </a:xfrm>
-          <a:prstGeom prst="rect">
-            <a:avLst/>
-          </a:prstGeom>
-        </p:spPr>
-      </p:pic>
-      <p:pic>
-        <p:nvPicPr>
-          <p:cNvPr id="4" name="Picture 3" descr="image.png"/>
-          <p:cNvPicPr>
-            <a:picLocks noChangeAspect="1"/>
-          </p:cNvPicPr>
-          <p:nvPr/>
-        </p:nvPicPr>
-        <p:blipFill>
-          <a:blip r:embed="rId3"/>
-          <a:stretch>
-            <a:fillRect/>
-          </a:stretch>
-        </p:blipFill>
-        <p:spPr>
-          <a:xfrm>
-            <a:off x="4349799" y="1976437"/>
-            <a:ext cx="3492549" cy="3905250"/>
-          </a:xfrm>
-          <a:prstGeom prst="rect">
-            <a:avLst/>
-          </a:prstGeom>
-        </p:spPr>
-      </p:pic>
-      <p:pic>
-        <p:nvPicPr>
-          <p:cNvPr id="5" name="Picture 4" descr="image.png"/>
-          <p:cNvPicPr>
-            <a:picLocks noChangeAspect="1"/>
-          </p:cNvPicPr>
-          <p:nvPr/>
-        </p:nvPicPr>
-        <p:blipFill>
-          <a:blip r:embed="rId4"/>
-          <a:stretch>
-            <a:fillRect/>
-          </a:stretch>
-        </p:blipFill>
-        <p:spPr>
-          <a:xfrm>
-            <a:off x="8128099" y="1976437"/>
-            <a:ext cx="3492549" cy="3905250"/>
-          </a:xfrm>
-          <a:prstGeom prst="rect">
-            <a:avLst/>
-          </a:prstGeom>
-        </p:spPr>
-      </p:pic>
-      <p:sp>
-        <p:nvSpPr>
-          <p:cNvPr id="6" name="TextBox 5"/>
-          <p:cNvSpPr txBox="1"/>
-          <p:nvPr/>
-        </p:nvSpPr>
-        <p:spPr>
-          <a:xfrm>
-            <a:off x="962025" y="3186112"/>
-            <a:ext cx="2847074" cy="400050"/>
-          </a:xfrm>
-          <a:prstGeom prst="rect">
-            <a:avLst/>
-          </a:prstGeom>
-          <a:noFill/>
-        </p:spPr>
-        <p:txBody>
-          <a:bodyPr wrap="square" lIns="0" tIns="0" rIns="0" bIns="0" anchor="t">
-            <a:spAutoFit/>
-          </a:bodyPr>
-          <a:lstStyle/>
-          <a:p>
-            <a:pPr algn="l"/>
-            <a:r>
-              <a:rPr sz="2100" b="1" i="0" u="none">
-                <a:solidFill>
-                  <a:srgbClr val="22C55E"/>
-                </a:solidFill>
-                <a:latin typeface="Poppins"/>
-              </a:rPr>
-              <a:t>Suivre</a:t>
-            </a:r>
-            <a:endParaRPr sz="2100" b="1" i="0" u="none">
-              <a:solidFill>
-                <a:srgbClr val="22C55E"/>
-              </a:solidFill>
-              <a:latin typeface="Poppins"/>
-            </a:endParaRPr>
-          </a:p>
-        </p:txBody>
-      </p:sp>
-      <p:sp>
-        <p:nvSpPr>
-          <p:cNvPr id="7" name="TextBox 6"/>
-          <p:cNvSpPr txBox="1"/>
-          <p:nvPr/>
-        </p:nvSpPr>
-        <p:spPr>
-          <a:xfrm>
-            <a:off x="962025" y="3776662"/>
-            <a:ext cx="2711499" cy="1219200"/>
-          </a:xfrm>
-          <a:prstGeom prst="rect">
-            <a:avLst/>
-          </a:prstGeom>
-          <a:noFill/>
-        </p:spPr>
-        <p:txBody>
-          <a:bodyPr wrap="square" lIns="0" tIns="0" rIns="0" bIns="0" anchor="t">
-            <a:spAutoFit/>
-          </a:bodyPr>
-          <a:lstStyle/>
-          <a:p>
-            <a:pPr algn="l">
-              <a:lnSpc>
-                <a:spcPts val="2400"/>
-              </a:lnSpc>
-            </a:pPr>
-            <a:r>
-              <a:rPr sz="1500" b="0" i="0" u="none">
-                <a:solidFill>
-                  <a:srgbClr val="CBD5E1"/>
-                </a:solidFill>
-                <a:latin typeface="Urbanist"/>
-              </a:rPr>
-              <a:t>Monitorer la consommation en temps réel pour identifier les postes les plus énergivores de votre installation.</a:t>
-            </a:r>
-            <a:endParaRPr sz="1500" b="0" i="0" u="none">
-              <a:solidFill>
-                <a:srgbClr val="CBD5E1"/>
-              </a:solidFill>
-              <a:latin typeface="Urbanist"/>
-            </a:endParaRPr>
-          </a:p>
-        </p:txBody>
-      </p:sp>
-      <p:sp>
-        <p:nvSpPr>
-          <p:cNvPr id="8" name="TextBox 7"/>
-          <p:cNvSpPr txBox="1"/>
-          <p:nvPr/>
-        </p:nvSpPr>
-        <p:spPr>
-          <a:xfrm>
-            <a:off x="4740324" y="3186112"/>
-            <a:ext cx="2847074" cy="400050"/>
-          </a:xfrm>
-          <a:prstGeom prst="rect">
-            <a:avLst/>
-          </a:prstGeom>
-          <a:noFill/>
-        </p:spPr>
-        <p:txBody>
-          <a:bodyPr wrap="square" lIns="0" tIns="0" rIns="0" bIns="0" anchor="t">
-            <a:spAutoFit/>
-          </a:bodyPr>
-          <a:lstStyle/>
-          <a:p>
-            <a:pPr algn="l"/>
-            <a:r>
-              <a:rPr sz="2100" b="1" i="0" u="none">
-                <a:solidFill>
-                  <a:srgbClr val="22C55E"/>
-                </a:solidFill>
-                <a:latin typeface="Poppins"/>
-              </a:rPr>
-              <a:t>Comprendre</a:t>
-            </a:r>
-            <a:endParaRPr sz="2100" b="1" i="0" u="none">
-              <a:solidFill>
-                <a:srgbClr val="22C55E"/>
-              </a:solidFill>
-              <a:latin typeface="Poppins"/>
-            </a:endParaRPr>
-          </a:p>
-        </p:txBody>
-      </p:sp>
-      <p:sp>
-        <p:nvSpPr>
-          <p:cNvPr id="9" name="TextBox 8"/>
-          <p:cNvSpPr txBox="1"/>
-          <p:nvPr/>
-        </p:nvSpPr>
-        <p:spPr>
-          <a:xfrm>
-            <a:off x="4740324" y="3776662"/>
-            <a:ext cx="2711499" cy="1219200"/>
-          </a:xfrm>
-          <a:prstGeom prst="rect">
-            <a:avLst/>
-          </a:prstGeom>
-          <a:noFill/>
-        </p:spPr>
-        <p:txBody>
-          <a:bodyPr wrap="square" lIns="0" tIns="0" rIns="0" bIns="0" anchor="t">
-            <a:spAutoFit/>
-          </a:bodyPr>
-          <a:lstStyle/>
-          <a:p>
-            <a:pPr algn="l">
-              <a:lnSpc>
-                <a:spcPts val="2400"/>
-              </a:lnSpc>
-            </a:pPr>
-            <a:r>
-              <a:rPr sz="1500" b="0" i="0" u="none">
-                <a:solidFill>
-                  <a:srgbClr val="CBD5E1"/>
-                </a:solidFill>
-                <a:latin typeface="Urbanist"/>
-              </a:rPr>
-              <a:t>Déchiffrer vos factures grâce à des analyses sémantiques et visuelles simplifiées, accessibles à tous.</a:t>
-            </a:r>
-            <a:endParaRPr sz="1500" b="0" i="0" u="none">
-              <a:solidFill>
-                <a:srgbClr val="CBD5E1"/>
-              </a:solidFill>
-              <a:latin typeface="Urbanist"/>
-            </a:endParaRPr>
-          </a:p>
-        </p:txBody>
-      </p:sp>
-      <p:sp>
-        <p:nvSpPr>
-          <p:cNvPr id="10" name="TextBox 9"/>
-          <p:cNvSpPr txBox="1"/>
-          <p:nvPr/>
-        </p:nvSpPr>
-        <p:spPr>
-          <a:xfrm>
-            <a:off x="8518624" y="3186112"/>
-            <a:ext cx="2847074" cy="400050"/>
-          </a:xfrm>
-          <a:prstGeom prst="rect">
-            <a:avLst/>
-          </a:prstGeom>
-          <a:noFill/>
-        </p:spPr>
-        <p:txBody>
-          <a:bodyPr wrap="square" lIns="0" tIns="0" rIns="0" bIns="0" anchor="t">
-            <a:spAutoFit/>
-          </a:bodyPr>
-          <a:lstStyle/>
-          <a:p>
-            <a:pPr algn="l"/>
-            <a:r>
-              <a:rPr sz="2100" b="1" i="0" u="none">
-                <a:solidFill>
-                  <a:srgbClr val="22C55E"/>
-                </a:solidFill>
-                <a:latin typeface="Poppins"/>
-              </a:rPr>
-              <a:t>Optimiser</a:t>
-            </a:r>
-            <a:endParaRPr sz="2100" b="1" i="0" u="none">
-              <a:solidFill>
-                <a:srgbClr val="22C55E"/>
-              </a:solidFill>
-              <a:latin typeface="Poppins"/>
-            </a:endParaRPr>
-          </a:p>
-        </p:txBody>
-      </p:sp>
-      <p:sp>
-        <p:nvSpPr>
-          <p:cNvPr id="11" name="TextBox 10"/>
-          <p:cNvSpPr txBox="1"/>
-          <p:nvPr/>
-        </p:nvSpPr>
-        <p:spPr>
-          <a:xfrm>
-            <a:off x="8518624" y="3776662"/>
-            <a:ext cx="2711499" cy="1524000"/>
-          </a:xfrm>
-          <a:prstGeom prst="rect">
-            <a:avLst/>
-          </a:prstGeom>
-          <a:noFill/>
-        </p:spPr>
-        <p:txBody>
-          <a:bodyPr wrap="square" lIns="0" tIns="0" rIns="0" bIns="0" anchor="t">
-            <a:spAutoFit/>
-          </a:bodyPr>
-          <a:lstStyle/>
-          <a:p>
-            <a:pPr algn="l">
-              <a:lnSpc>
-                <a:spcPts val="2400"/>
-              </a:lnSpc>
-            </a:pPr>
-            <a:r>
-              <a:rPr sz="1500" b="0" i="0" u="none">
-                <a:solidFill>
-                  <a:srgbClr val="CBD5E1"/>
-                </a:solidFill>
-                <a:latin typeface="Urbanist"/>
-              </a:rPr>
-              <a:t>Exploiter la puissance de l'IA pour recevoir des recommandations personnalisées et réduire vos dépenses.</a:t>
-            </a:r>
-            <a:endParaRPr sz="1500" b="0" i="0" u="none">
-              <a:solidFill>
-                <a:srgbClr val="CBD5E1"/>
-              </a:solidFill>
-              <a:latin typeface="Urbanist"/>
-            </a:endParaRPr>
-          </a:p>
-        </p:txBody>
-      </p:sp>
-      <p:pic>
-        <p:nvPicPr>
-          <p:cNvPr id="12" name="Picture 11" descr="image.png"/>
-          <p:cNvPicPr>
-            <a:picLocks noChangeAspect="1"/>
-          </p:cNvPicPr>
-          <p:nvPr/>
-        </p:nvPicPr>
-        <p:blipFill>
-          <a:blip r:embed="rId5"/>
-          <a:stretch>
-            <a:fillRect/>
-          </a:stretch>
-        </p:blipFill>
-        <p:spPr>
-          <a:xfrm>
-            <a:off x="962025" y="2405062"/>
-            <a:ext cx="476250" cy="476250"/>
-          </a:xfrm>
-          <a:prstGeom prst="rect">
-            <a:avLst/>
-          </a:prstGeom>
-        </p:spPr>
-      </p:pic>
-      <p:pic>
-        <p:nvPicPr>
-          <p:cNvPr id="13" name="Picture 12" descr="image.png"/>
-          <p:cNvPicPr>
-            <a:picLocks noChangeAspect="1"/>
-          </p:cNvPicPr>
-          <p:nvPr/>
-        </p:nvPicPr>
-        <p:blipFill>
-          <a:blip r:embed="rId6"/>
-          <a:stretch>
-            <a:fillRect/>
-          </a:stretch>
-        </p:blipFill>
-        <p:spPr>
-          <a:xfrm>
-            <a:off x="4740324" y="2405062"/>
-            <a:ext cx="476250" cy="476250"/>
-          </a:xfrm>
-          <a:prstGeom prst="rect">
-            <a:avLst/>
-          </a:prstGeom>
-        </p:spPr>
-      </p:pic>
-      <p:pic>
-        <p:nvPicPr>
-          <p:cNvPr id="14" name="Picture 13" descr="image.png"/>
-          <p:cNvPicPr>
-            <a:picLocks noChangeAspect="1"/>
-          </p:cNvPicPr>
-          <p:nvPr/>
-        </p:nvPicPr>
-        <p:blipFill>
-          <a:blip r:embed="rId7"/>
-          <a:stretch>
-            <a:fillRect/>
-          </a:stretch>
-        </p:blipFill>
-        <p:spPr>
-          <a:xfrm>
-            <a:off x="8518624" y="2405062"/>
-            <a:ext cx="533400" cy="476250"/>
-          </a:xfrm>
-          <a:prstGeom prst="rect">
-            <a:avLst/>
-          </a:prstGeom>
-        </p:spPr>
-      </p:pic>
-      <p:sp>
-        <p:nvSpPr>
-          <p:cNvPr id="15" name="TextBox 14"/>
-          <p:cNvSpPr txBox="1"/>
-          <p:nvPr/>
-        </p:nvSpPr>
-        <p:spPr>
-          <a:xfrm>
-            <a:off x="762000" y="571500"/>
-            <a:ext cx="11401425" cy="619125"/>
-          </a:xfrm>
-          <a:prstGeom prst="rect">
-            <a:avLst/>
-          </a:prstGeom>
-          <a:noFill/>
-        </p:spPr>
-        <p:txBody>
-          <a:bodyPr wrap="square" lIns="0" tIns="0" rIns="0" bIns="0" anchor="t">
-            <a:spAutoFit/>
-          </a:bodyPr>
-          <a:lstStyle/>
-          <a:p>
-            <a:pPr algn="l"/>
-            <a:r>
-              <a:rPr sz="3300" b="1" i="0" u="none">
-                <a:solidFill>
-                  <a:srgbClr val="FFFFFF"/>
-                </a:solidFill>
-                <a:latin typeface="Poppins"/>
-              </a:rPr>
-              <a:t>NOS OBJECTIFS STRATÉGIQUES</a:t>
-            </a:r>
-            <a:endParaRPr sz="3300" b="1" i="0" u="none">
-              <a:solidFill>
-                <a:srgbClr val="FFFFFF"/>
-              </a:solidFill>
-              <a:latin typeface="Poppins"/>
-            </a:endParaRPr>
-          </a:p>
-        </p:txBody>
-      </p:sp>
-      <p:sp>
-        <p:nvSpPr>
-          <p:cNvPr id="16" name="Rectangle 15"/>
-          <p:cNvSpPr/>
-          <p:nvPr/>
-        </p:nvSpPr>
-        <p:spPr>
-          <a:xfrm>
-            <a:off x="571500" y="571500"/>
-            <a:ext cx="57150" cy="619125"/>
-          </a:xfrm>
-          <a:prstGeom prst="rect">
-            <a:avLst/>
-          </a:prstGeom>
-          <a:solidFill>
-            <a:srgbClr val="F97316"/>
-          </a:solidFill>
-          <a:ln>
-            <a:noFill/>
-          </a:ln>
-          <a:effectLst/>
-        </p:spPr>
-        <p:style>
-          <a:lnRef idx="1">
-            <a:schemeClr val="accent1"/>
-          </a:lnRef>
-          <a:fillRef idx="3">
-            <a:schemeClr val="accent1"/>
-          </a:fillRef>
-          <a:effectRef idx="2">
-            <a:schemeClr val="accent1"/>
-          </a:effectRef>
-          <a:fontRef idx="minor">
-            <a:schemeClr val="lt1"/>
-          </a:fontRef>
-        </p:style>
-        <p:txBody>
-          <a:bodyPr rtlCol="0" anchor="ctr"/>
-          <a:lstStyle/>
-          <a:p>
-            <a:pPr algn="ctr"/>
-          </a:p>
-        </p:txBody>
-      </p:sp>
-    </p:spTree>
-  </p:cSld>
-  <p:clrMapOvr>
-    <a:masterClrMapping/>
-  </p:clrMapOvr>
-</p:sld>
-</file>
-
-<file path=ppt/slides/slide6.xml><?xml version="1.0" encoding="utf-8"?>
-<p:sld xmlns:a="http://schemas.openxmlformats.org/drawingml/2006/main" xmlns:r="http://schemas.openxmlformats.org/officeDocument/2006/relationships" xmlns:p="http://schemas.openxmlformats.org/presentationml/2006/main">
-  <p:cSld>
-    <p:bg>
-      <p:bgPr>
-        <a:solidFill>
-          <a:srgbClr val="0F172A"/>
-        </a:solidFill>
-        <a:effectLst/>
-      </p:bgPr>
-    </p:bg>
-    <p:spTree>
-      <p:nvGrpSpPr>
-        <p:cNvPr id="1" name=""/>
-        <p:cNvGrpSpPr/>
-        <p:nvPr/>
-      </p:nvGrpSpPr>
-      <p:grpSpPr/>
-      <p:pic>
-        <p:nvPicPr>
-          <p:cNvPr id="2" name="Picture 1" descr="image.png"/>
-          <p:cNvPicPr>
-            <a:picLocks noChangeAspect="1"/>
-          </p:cNvPicPr>
-          <p:nvPr/>
-        </p:nvPicPr>
-        <p:blipFill>
-          <a:blip r:embed="rId1"/>
-          <a:stretch>
-            <a:fillRect/>
-          </a:stretch>
-        </p:blipFill>
-        <p:spPr>
-          <a:xfrm>
-            <a:off x="0" y="0"/>
-            <a:ext cx="12192000" cy="6858000"/>
-          </a:xfrm>
-          <a:prstGeom prst="rect">
-            <a:avLst/>
-          </a:prstGeom>
-        </p:spPr>
-      </p:pic>
-      <p:sp>
-        <p:nvSpPr>
-          <p:cNvPr id="3" name="TextBox 2"/>
-          <p:cNvSpPr txBox="1"/>
-          <p:nvPr/>
-        </p:nvSpPr>
-        <p:spPr>
-          <a:xfrm>
-            <a:off x="762000" y="571500"/>
-            <a:ext cx="5000625" cy="1238250"/>
-          </a:xfrm>
-          <a:prstGeom prst="rect">
-            <a:avLst/>
-          </a:prstGeom>
-          <a:noFill/>
-        </p:spPr>
-        <p:txBody>
-          <a:bodyPr wrap="square" lIns="0" tIns="0" rIns="0" bIns="0" anchor="t">
-            <a:spAutoFit/>
-          </a:bodyPr>
-          <a:lstStyle/>
-          <a:p>
-            <a:pPr algn="l"/>
-            <a:r>
-              <a:rPr sz="3300" b="1" i="0" u="none">
-                <a:solidFill>
-                  <a:srgbClr val="FFFFFF"/>
-                </a:solidFill>
-                <a:latin typeface="Poppins"/>
-              </a:rPr>
-              <a:t>LA SOLUTION ANGOVO</a:t>
-            </a:r>
-            <a:endParaRPr sz="3300" b="1" i="0" u="none">
-              <a:solidFill>
-                <a:srgbClr val="FFFFFF"/>
-              </a:solidFill>
-              <a:latin typeface="Poppins"/>
-            </a:endParaRPr>
-          </a:p>
-        </p:txBody>
-      </p:sp>
-      <p:sp>
-        <p:nvSpPr>
-          <p:cNvPr id="4" name="Rectangle 3"/>
-          <p:cNvSpPr/>
-          <p:nvPr/>
-        </p:nvSpPr>
-        <p:spPr>
-          <a:xfrm>
-            <a:off x="571500" y="571500"/>
-            <a:ext cx="57150" cy="1238250"/>
-          </a:xfrm>
-          <a:prstGeom prst="rect">
-            <a:avLst/>
-          </a:prstGeom>
-          <a:solidFill>
-            <a:srgbClr val="F97316"/>
-          </a:solidFill>
-          <a:ln>
-            <a:noFill/>
-          </a:ln>
-          <a:effectLst/>
-        </p:spPr>
-        <p:style>
-          <a:lnRef idx="1">
-            <a:schemeClr val="accent1"/>
-          </a:lnRef>
-          <a:fillRef idx="3">
-            <a:schemeClr val="accent1"/>
-          </a:fillRef>
-          <a:effectRef idx="2">
-            <a:schemeClr val="accent1"/>
-          </a:effectRef>
-          <a:fontRef idx="minor">
-            <a:schemeClr val="lt1"/>
-          </a:fontRef>
-        </p:style>
-        <p:txBody>
-          <a:bodyPr rtlCol="0" anchor="ctr"/>
-          <a:lstStyle/>
-          <a:p>
-            <a:pPr algn="ctr"/>
-          </a:p>
-        </p:txBody>
-      </p:sp>
-      <p:pic>
-        <p:nvPicPr>
-          <p:cNvPr id="5" name="Picture 4" descr="image.png"/>
-          <p:cNvPicPr>
-            <a:picLocks noChangeAspect="1"/>
-          </p:cNvPicPr>
-          <p:nvPr/>
-        </p:nvPicPr>
-        <p:blipFill>
-          <a:blip r:embed="rId2"/>
-          <a:stretch>
-            <a:fillRect/>
-          </a:stretch>
-        </p:blipFill>
-        <p:spPr>
-          <a:xfrm>
-            <a:off x="6096000" y="0"/>
-            <a:ext cx="6096000" cy="6858000"/>
-          </a:xfrm>
-          <a:prstGeom prst="rect">
-            <a:avLst/>
-          </a:prstGeom>
-        </p:spPr>
-      </p:pic>
-      <p:sp>
-        <p:nvSpPr>
-          <p:cNvPr id="6" name="TextBox 5"/>
-          <p:cNvSpPr txBox="1"/>
-          <p:nvPr/>
-        </p:nvSpPr>
-        <p:spPr>
-          <a:xfrm>
-            <a:off x="571500" y="2190750"/>
-            <a:ext cx="5200650" cy="276225"/>
-          </a:xfrm>
-          <a:prstGeom prst="rect">
-            <a:avLst/>
-          </a:prstGeom>
-          <a:noFill/>
-        </p:spPr>
-        <p:txBody>
-          <a:bodyPr wrap="square" lIns="0" tIns="0" rIns="0" bIns="0" anchor="t">
-            <a:spAutoFit/>
-          </a:bodyPr>
-          <a:lstStyle/>
-          <a:p>
-            <a:pPr algn="l"/>
-            <a:r>
-              <a:rPr sz="1405" b="1" i="0" u="none">
-                <a:solidFill>
-                  <a:srgbClr val="22C55E"/>
-                </a:solidFill>
-                <a:latin typeface="Poppins"/>
-              </a:rPr>
-              <a:t>L'Intelligence Artificielle au Service du Réseau</a:t>
-            </a:r>
-            <a:endParaRPr sz="1405" b="1" i="0" u="none">
-              <a:solidFill>
-                <a:srgbClr val="22C55E"/>
-              </a:solidFill>
-              <a:latin typeface="Poppins"/>
-            </a:endParaRPr>
-          </a:p>
-        </p:txBody>
-      </p:sp>
-      <p:sp>
-        <p:nvSpPr>
-          <p:cNvPr id="7" name="TextBox 6"/>
-          <p:cNvSpPr txBox="1"/>
-          <p:nvPr/>
-        </p:nvSpPr>
-        <p:spPr>
-          <a:xfrm>
-            <a:off x="571500" y="2657475"/>
-            <a:ext cx="4953000" cy="1219200"/>
-          </a:xfrm>
-          <a:prstGeom prst="rect">
-            <a:avLst/>
-          </a:prstGeom>
-          <a:noFill/>
-        </p:spPr>
-        <p:txBody>
-          <a:bodyPr wrap="square" lIns="0" tIns="0" rIns="0" bIns="0" anchor="t">
-            <a:spAutoFit/>
-          </a:bodyPr>
-          <a:lstStyle/>
-          <a:p>
-            <a:pPr algn="l">
-              <a:lnSpc>
-                <a:spcPts val="2400"/>
-              </a:lnSpc>
-            </a:pPr>
-            <a:r>
-              <a:rPr sz="1500" b="0" i="0" u="none">
-                <a:solidFill>
-                  <a:srgbClr val="CBD5E1"/>
-                </a:solidFill>
-                <a:latin typeface="Urbanist"/>
-              </a:rPr>
-              <a:t>ANGOVO centralise l'ensemble de vos flux de données énergétiques. Notre algorithme propriétaire analyse vos habitudes et détecte les anomalies avant même qu'elles n'impactent votre facture.</a:t>
-            </a:r>
-            <a:endParaRPr sz="1500" b="0" i="0" u="none">
-              <a:solidFill>
-                <a:srgbClr val="CBD5E1"/>
-              </a:solidFill>
-              <a:latin typeface="Urbanist"/>
-            </a:endParaRPr>
-          </a:p>
-        </p:txBody>
-      </p:sp>
-      <p:sp>
-        <p:nvSpPr>
-          <p:cNvPr id="8" name="TextBox 7"/>
-          <p:cNvSpPr txBox="1"/>
-          <p:nvPr/>
-        </p:nvSpPr>
-        <p:spPr>
-          <a:xfrm>
-            <a:off x="571500" y="4257675"/>
-            <a:ext cx="4953000" cy="609600"/>
-          </a:xfrm>
-          <a:prstGeom prst="rect">
-            <a:avLst/>
-          </a:prstGeom>
-          <a:noFill/>
-        </p:spPr>
-        <p:txBody>
-          <a:bodyPr wrap="square" lIns="0" tIns="0" rIns="0" bIns="0" anchor="t">
-            <a:spAutoFit/>
-          </a:bodyPr>
-          <a:lstStyle/>
-          <a:p>
-            <a:pPr algn="l">
-              <a:lnSpc>
-                <a:spcPts val="2400"/>
-              </a:lnSpc>
-            </a:pPr>
-            <a:r>
-              <a:rPr sz="1500" b="0" i="0" u="none">
-                <a:solidFill>
-                  <a:srgbClr val="CBD5E1"/>
-                </a:solidFill>
-                <a:latin typeface="Urbanist"/>
-              </a:rPr>
-              <a:t>Une solution logicielle robuste, sécurisée et évolutive conçue pour répondre aux défis spécifiques du marché local.</a:t>
-            </a:r>
-            <a:endParaRPr sz="1500" b="0" i="0" u="none">
-              <a:solidFill>
-                <a:srgbClr val="CBD5E1"/>
-              </a:solidFill>
-              <a:latin typeface="Urbanist"/>
-            </a:endParaRPr>
-          </a:p>
-        </p:txBody>
-      </p:sp>
-    </p:spTree>
-  </p:cSld>
-  <p:clrMapOvr>
-    <a:masterClrMapping/>
-  </p:clrMapOvr>
-</p:sld>
-</file>
-
-<file path=ppt/slides/slide7.xml><?xml version="1.0" encoding="utf-8"?>
-<p:sld xmlns:a="http://schemas.openxmlformats.org/drawingml/2006/main" xmlns:r="http://schemas.openxmlformats.org/officeDocument/2006/relationships" xmlns:p="http://schemas.openxmlformats.org/presentationml/2006/main">
-  <p:cSld>
-    <p:bg>
-      <p:bgPr>
-        <a:solidFill>
-          <a:srgbClr val="0F172A"/>
-        </a:solidFill>
-        <a:effectLst/>
-      </p:bgPr>
-    </p:bg>
-    <p:spTree>
-      <p:nvGrpSpPr>
-        <p:cNvPr id="1" name=""/>
-        <p:cNvGrpSpPr/>
-        <p:nvPr/>
-      </p:nvGrpSpPr>
-      <p:grpSpPr/>
-      <p:pic>
-        <p:nvPicPr>
-          <p:cNvPr id="2" name="Picture 1" descr="image.png"/>
-          <p:cNvPicPr>
-            <a:picLocks noChangeAspect="1"/>
-          </p:cNvPicPr>
-          <p:nvPr/>
-        </p:nvPicPr>
-        <p:blipFill>
-          <a:blip r:embed="rId1"/>
-          <a:stretch>
-            <a:fillRect/>
-          </a:stretch>
-        </p:blipFill>
-        <p:spPr>
-          <a:xfrm>
-            <a:off x="0" y="0"/>
-            <a:ext cx="12192000" cy="6858000"/>
-          </a:xfrm>
-          <a:prstGeom prst="rect">
-            <a:avLst/>
-          </a:prstGeom>
-        </p:spPr>
-      </p:pic>
-      <p:sp>
-        <p:nvSpPr>
-          <p:cNvPr id="3" name="TextBox 2"/>
-          <p:cNvSpPr txBox="1"/>
-          <p:nvPr/>
-        </p:nvSpPr>
-        <p:spPr>
-          <a:xfrm>
-            <a:off x="571500" y="3005137"/>
-            <a:ext cx="5238750" cy="1524000"/>
-          </a:xfrm>
-          <a:prstGeom prst="rect">
-            <a:avLst/>
-          </a:prstGeom>
-          <a:noFill/>
-        </p:spPr>
-        <p:txBody>
-          <a:bodyPr wrap="square" lIns="0" tIns="0" rIns="0" bIns="0" anchor="t">
-            <a:spAutoFit/>
-          </a:bodyPr>
-          <a:lstStyle/>
-          <a:p>
-            <a:pPr algn="ctr">
-              <a:lnSpc>
-                <a:spcPts val="12000"/>
-              </a:lnSpc>
-            </a:pPr>
-            <a:r>
-              <a:rPr sz="12000" b="0" i="0" u="none">
-                <a:solidFill>
-                  <a:srgbClr val="F97316"/>
-                </a:solidFill>
-                <a:latin typeface="Urbanist ExtraBold"/>
-              </a:rPr>
-              <a:t>-30</a:t>
-            </a:r>
-            <a:r>
-              <a:rPr sz="12000" b="0" i="0" u="none">
-                <a:solidFill>
-                  <a:srgbClr val="F97316"/>
-                </a:solidFill>
-                <a:latin typeface="Urbanist ExtraBold"/>
-              </a:rPr>
-              <a:t>%</a:t>
-            </a:r>
-            <a:endParaRPr sz="12000" b="0" i="0" u="none">
-              <a:solidFill>
-                <a:srgbClr val="F97316"/>
-              </a:solidFill>
-              <a:latin typeface="Urbanist ExtraBold"/>
-            </a:endParaRPr>
-          </a:p>
-        </p:txBody>
-      </p:sp>
-      <p:sp>
-        <p:nvSpPr>
-          <p:cNvPr id="4" name="TextBox 3"/>
-          <p:cNvSpPr txBox="1"/>
-          <p:nvPr/>
-        </p:nvSpPr>
-        <p:spPr>
-          <a:xfrm>
-            <a:off x="571500" y="4529137"/>
-            <a:ext cx="5238750" cy="323850"/>
-          </a:xfrm>
-          <a:prstGeom prst="rect">
-            <a:avLst/>
-          </a:prstGeom>
-          <a:noFill/>
-        </p:spPr>
-        <p:txBody>
-          <a:bodyPr wrap="square" lIns="0" tIns="0" rIns="0" bIns="0" anchor="t">
-            <a:spAutoFit/>
-          </a:bodyPr>
-          <a:lstStyle/>
-          <a:p>
-            <a:pPr algn="ctr"/>
-            <a:r>
-              <a:rPr sz="2100" b="1" i="0" u="none">
-                <a:solidFill>
-                  <a:srgbClr val="94A3B8"/>
-                </a:solidFill>
-                <a:latin typeface="Urbanist"/>
-              </a:rPr>
-              <a:t>ÉCONOMIE MOYENNE</a:t>
-            </a:r>
-            <a:endParaRPr sz="2100" b="1" i="0" u="none">
-              <a:solidFill>
-                <a:srgbClr val="94A3B8"/>
-              </a:solidFill>
-              <a:latin typeface="Urbanist"/>
-            </a:endParaRPr>
-          </a:p>
-        </p:txBody>
-      </p:sp>
-      <p:sp>
-        <p:nvSpPr>
-          <p:cNvPr id="5" name="TextBox 4"/>
-          <p:cNvSpPr txBox="1"/>
-          <p:nvPr/>
-        </p:nvSpPr>
-        <p:spPr>
-          <a:xfrm>
-            <a:off x="6381750" y="2266950"/>
-            <a:ext cx="5500687" cy="276225"/>
-          </a:xfrm>
-          <a:prstGeom prst="rect">
-            <a:avLst/>
-          </a:prstGeom>
-          <a:noFill/>
-        </p:spPr>
-        <p:txBody>
-          <a:bodyPr wrap="square" lIns="0" tIns="0" rIns="0" bIns="0" anchor="t">
-            <a:spAutoFit/>
-          </a:bodyPr>
-          <a:lstStyle/>
-          <a:p>
-            <a:pPr algn="l"/>
-            <a:r>
-              <a:rPr sz="1405" b="1" i="0" u="none">
-                <a:solidFill>
-                  <a:srgbClr val="FFFFFF"/>
-                </a:solidFill>
-                <a:latin typeface="Poppins"/>
-              </a:rPr>
-              <a:t>Impact Réel sur le Pouvoir d'Achat</a:t>
-            </a:r>
-            <a:endParaRPr sz="1405" b="1" i="0" u="none">
-              <a:solidFill>
-                <a:srgbClr val="FFFFFF"/>
-              </a:solidFill>
-              <a:latin typeface="Poppins"/>
-            </a:endParaRPr>
-          </a:p>
-        </p:txBody>
-      </p:sp>
-      <p:sp>
-        <p:nvSpPr>
-          <p:cNvPr id="6" name="TextBox 5"/>
-          <p:cNvSpPr txBox="1"/>
-          <p:nvPr/>
-        </p:nvSpPr>
-        <p:spPr>
-          <a:xfrm>
-            <a:off x="6381750" y="2733675"/>
-            <a:ext cx="5238750" cy="1219200"/>
-          </a:xfrm>
-          <a:prstGeom prst="rect">
-            <a:avLst/>
-          </a:prstGeom>
-          <a:noFill/>
-        </p:spPr>
-        <p:txBody>
-          <a:bodyPr wrap="square" lIns="0" tIns="0" rIns="0" bIns="0" anchor="t">
-            <a:spAutoFit/>
-          </a:bodyPr>
-          <a:lstStyle/>
-          <a:p>
-            <a:pPr algn="l">
-              <a:lnSpc>
-                <a:spcPts val="2400"/>
-              </a:lnSpc>
-            </a:pPr>
-            <a:r>
-              <a:rPr sz="1500" b="0" i="0" u="none">
-                <a:solidFill>
-                  <a:srgbClr val="CBD5E1"/>
-                </a:solidFill>
-                <a:latin typeface="Urbanist"/>
-              </a:rPr>
-              <a:t>En optimisant l'usage de vos appareils et en suivant nos recommandations IA, les utilisateurs d'ANGOVO constatent une réduction significative de leurs dépenses dès les premiers mois.</a:t>
-            </a:r>
-            <a:endParaRPr sz="1500" b="0" i="0" u="none">
-              <a:solidFill>
-                <a:srgbClr val="CBD5E1"/>
-              </a:solidFill>
-              <a:latin typeface="Urbanist"/>
-            </a:endParaRPr>
-          </a:p>
-        </p:txBody>
-      </p:sp>
-      <p:sp>
-        <p:nvSpPr>
-          <p:cNvPr id="7" name="TextBox 6"/>
-          <p:cNvSpPr txBox="1"/>
-          <p:nvPr/>
-        </p:nvSpPr>
-        <p:spPr>
-          <a:xfrm>
-            <a:off x="6381750" y="4238625"/>
-            <a:ext cx="5238750" cy="304800"/>
-          </a:xfrm>
-          <a:prstGeom prst="rect">
-            <a:avLst/>
-          </a:prstGeom>
-          <a:noFill/>
-        </p:spPr>
-        <p:txBody>
-          <a:bodyPr wrap="square" lIns="190500" tIns="0" rIns="0" bIns="0" anchor="t">
-            <a:spAutoFit/>
-          </a:bodyPr>
-          <a:lstStyle/>
-          <a:p>
-            <a:pPr algn="l">
-              <a:lnSpc>
-                <a:spcPts val="2400"/>
-              </a:lnSpc>
-            </a:pPr>
-            <a:r>
-              <a:rPr sz="1500" b="0" i="0" u="none">
-                <a:solidFill>
-                  <a:srgbClr val="CBD5E1"/>
-                </a:solidFill>
-                <a:latin typeface="Urbanist"/>
-              </a:rPr>
-              <a:t>Détection des fuites de courant</a:t>
-            </a:r>
-            <a:endParaRPr sz="1500" b="0" i="0" u="none">
-              <a:solidFill>
-                <a:srgbClr val="CBD5E1"/>
-              </a:solidFill>
-              <a:latin typeface="Urbanist"/>
-            </a:endParaRPr>
-          </a:p>
-        </p:txBody>
-      </p:sp>
-      <p:sp>
-        <p:nvSpPr>
-          <p:cNvPr id="8" name="TextBox 7"/>
-          <p:cNvSpPr txBox="1"/>
-          <p:nvPr/>
-        </p:nvSpPr>
-        <p:spPr>
-          <a:xfrm>
-            <a:off x="6381750" y="4686300"/>
-            <a:ext cx="5238750" cy="304800"/>
-          </a:xfrm>
-          <a:prstGeom prst="rect">
-            <a:avLst/>
-          </a:prstGeom>
-          <a:noFill/>
-        </p:spPr>
-        <p:txBody>
-          <a:bodyPr wrap="square" lIns="190500" tIns="0" rIns="0" bIns="0" anchor="t">
-            <a:spAutoFit/>
-          </a:bodyPr>
-          <a:lstStyle/>
-          <a:p>
-            <a:pPr algn="l">
-              <a:lnSpc>
-                <a:spcPts val="2400"/>
-              </a:lnSpc>
-            </a:pPr>
-            <a:r>
-              <a:rPr sz="1500" b="0" i="0" u="none">
-                <a:solidFill>
-                  <a:srgbClr val="CBD5E1"/>
-                </a:solidFill>
-                <a:latin typeface="Urbanist"/>
-              </a:rPr>
-              <a:t>Alertes de dépassement de seuil</a:t>
-            </a:r>
-            <a:endParaRPr sz="1500" b="0" i="0" u="none">
-              <a:solidFill>
-                <a:srgbClr val="CBD5E1"/>
-              </a:solidFill>
-              <a:latin typeface="Urbanist"/>
-            </a:endParaRPr>
-          </a:p>
-        </p:txBody>
-      </p:sp>
-      <p:sp>
-        <p:nvSpPr>
-          <p:cNvPr id="9" name="TextBox 8"/>
-          <p:cNvSpPr txBox="1"/>
-          <p:nvPr/>
-        </p:nvSpPr>
-        <p:spPr>
-          <a:xfrm>
-            <a:off x="6381750" y="5133975"/>
-            <a:ext cx="5238750" cy="304800"/>
-          </a:xfrm>
-          <a:prstGeom prst="rect">
-            <a:avLst/>
-          </a:prstGeom>
-          <a:noFill/>
-        </p:spPr>
-        <p:txBody>
-          <a:bodyPr wrap="square" lIns="190500" tIns="0" rIns="0" bIns="0" anchor="t">
-            <a:spAutoFit/>
-          </a:bodyPr>
-          <a:lstStyle/>
-          <a:p>
-            <a:pPr algn="l">
-              <a:lnSpc>
-                <a:spcPts val="2400"/>
-              </a:lnSpc>
-            </a:pPr>
-            <a:r>
-              <a:rPr sz="1500" b="0" i="0" u="none">
-                <a:solidFill>
-                  <a:srgbClr val="CBD5E1"/>
-                </a:solidFill>
-                <a:latin typeface="Urbanist"/>
-              </a:rPr>
-              <a:t>Planification intelligente des cycles</a:t>
-            </a:r>
-            <a:endParaRPr sz="1500" b="0" i="0" u="none">
-              <a:solidFill>
-                <a:srgbClr val="CBD5E1"/>
-              </a:solidFill>
-              <a:latin typeface="Urbanist"/>
-            </a:endParaRPr>
-          </a:p>
-        </p:txBody>
-      </p:sp>
-      <p:pic>
-        <p:nvPicPr>
-          <p:cNvPr id="10" name="Picture 9" descr="image.png"/>
-          <p:cNvPicPr>
-            <a:picLocks noChangeAspect="1"/>
-          </p:cNvPicPr>
-          <p:nvPr/>
-        </p:nvPicPr>
-        <p:blipFill>
-          <a:blip r:embed="rId2"/>
-          <a:stretch>
-            <a:fillRect/>
-          </a:stretch>
-        </p:blipFill>
-        <p:spPr>
-          <a:xfrm>
-            <a:off x="6381750" y="4291012"/>
-            <a:ext cx="190500" cy="200025"/>
-          </a:xfrm>
-          <a:prstGeom prst="rect">
-            <a:avLst/>
-          </a:prstGeom>
-        </p:spPr>
-      </p:pic>
-      <p:pic>
-        <p:nvPicPr>
-          <p:cNvPr id="11" name="Picture 10" descr="image.png"/>
-          <p:cNvPicPr>
-            <a:picLocks noChangeAspect="1"/>
-          </p:cNvPicPr>
-          <p:nvPr/>
-        </p:nvPicPr>
-        <p:blipFill>
-          <a:blip r:embed="rId2"/>
-          <a:stretch>
-            <a:fillRect/>
-          </a:stretch>
-        </p:blipFill>
-        <p:spPr>
-          <a:xfrm>
-            <a:off x="6381750" y="4738687"/>
-            <a:ext cx="190500" cy="200025"/>
-          </a:xfrm>
-          <a:prstGeom prst="rect">
-            <a:avLst/>
-          </a:prstGeom>
-        </p:spPr>
-      </p:pic>
-      <p:pic>
-        <p:nvPicPr>
-          <p:cNvPr id="12" name="Picture 11" descr="image.png"/>
-          <p:cNvPicPr>
-            <a:picLocks noChangeAspect="1"/>
-          </p:cNvPicPr>
-          <p:nvPr/>
-        </p:nvPicPr>
-        <p:blipFill>
-          <a:blip r:embed="rId2"/>
-          <a:stretch>
-            <a:fillRect/>
-          </a:stretch>
-        </p:blipFill>
-        <p:spPr>
-          <a:xfrm>
-            <a:off x="6381750" y="5186362"/>
-            <a:ext cx="190500" cy="200025"/>
-          </a:xfrm>
-          <a:prstGeom prst="rect">
-            <a:avLst/>
-          </a:prstGeom>
-        </p:spPr>
-      </p:pic>
-      <p:sp>
-        <p:nvSpPr>
-          <p:cNvPr id="13" name="TextBox 12"/>
-          <p:cNvSpPr txBox="1"/>
-          <p:nvPr/>
-        </p:nvSpPr>
-        <p:spPr>
-          <a:xfrm>
-            <a:off x="762000" y="571500"/>
-            <a:ext cx="11401425" cy="619125"/>
-          </a:xfrm>
-          <a:prstGeom prst="rect">
-            <a:avLst/>
-          </a:prstGeom>
-          <a:noFill/>
-        </p:spPr>
-        <p:txBody>
-          <a:bodyPr wrap="square" lIns="0" tIns="0" rIns="0" bIns="0" anchor="t">
-            <a:spAutoFit/>
-          </a:bodyPr>
-          <a:lstStyle/>
-          <a:p>
-            <a:pPr algn="l"/>
-            <a:r>
-              <a:rPr sz="3300" b="1" i="0" u="none">
-                <a:solidFill>
-                  <a:srgbClr val="FFFFFF"/>
-                </a:solidFill>
-                <a:latin typeface="Poppins"/>
-              </a:rPr>
-              <a:t>PERFORMANCE &amp; EFFICACITÉ</a:t>
-            </a:r>
-            <a:endParaRPr sz="3300" b="1" i="0" u="none">
-              <a:solidFill>
-                <a:srgbClr val="FFFFFF"/>
-              </a:solidFill>
-              <a:latin typeface="Poppins"/>
-            </a:endParaRPr>
-          </a:p>
-        </p:txBody>
-      </p:sp>
-      <p:sp>
-        <p:nvSpPr>
-          <p:cNvPr id="14" name="Rectangle 13"/>
-          <p:cNvSpPr/>
-          <p:nvPr/>
-        </p:nvSpPr>
-        <p:spPr>
-          <a:xfrm>
-            <a:off x="571500" y="571500"/>
-            <a:ext cx="57150" cy="619125"/>
-          </a:xfrm>
-          <a:prstGeom prst="rect">
-            <a:avLst/>
-          </a:prstGeom>
-          <a:solidFill>
-            <a:srgbClr val="F97316"/>
-          </a:solidFill>
-          <a:ln>
-            <a:noFill/>
-          </a:ln>
-          <a:effectLst/>
-        </p:spPr>
-        <p:style>
-          <a:lnRef idx="1">
-            <a:schemeClr val="accent1"/>
-          </a:lnRef>
-          <a:fillRef idx="3">
-            <a:schemeClr val="accent1"/>
-          </a:fillRef>
-          <a:effectRef idx="2">
-            <a:schemeClr val="accent1"/>
-          </a:effectRef>
-          <a:fontRef idx="minor">
-            <a:schemeClr val="lt1"/>
-          </a:fontRef>
-        </p:style>
-        <p:txBody>
-          <a:bodyPr rtlCol="0" anchor="ctr"/>
-          <a:lstStyle/>
-          <a:p>
-            <a:pPr algn="ctr"/>
-          </a:p>
-        </p:txBody>
-      </p:sp>
-    </p:spTree>
-  </p:cSld>
-  <p:clrMapOvr>
-    <a:masterClrMapping/>
-  </p:clrMapOvr>
-</p:sld>
-</file>
-
 <file path=ppt/slides/slide8.xml><?xml version="1.0" encoding="utf-8"?>
 <p:sld xmlns:a="http://schemas.openxmlformats.org/drawingml/2006/main" xmlns:r="http://schemas.openxmlformats.org/officeDocument/2006/relationships" xmlns:p="http://schemas.openxmlformats.org/presentationml/2006/main">
   <p:cSld>
@@ -6843,8 +6642,8 @@
         </p:blipFill>
         <p:spPr>
           <a:xfrm>
-            <a:off x="571500" y="3348037"/>
-            <a:ext cx="11049000" cy="19050"/>
+            <a:off x="5843587" y="1892647"/>
+            <a:ext cx="504825" cy="571500"/>
           </a:xfrm>
           <a:prstGeom prst="rect">
             <a:avLst/>
@@ -6859,8 +6658,8 @@
         </p:nvSpPr>
         <p:spPr>
           <a:xfrm>
-            <a:off x="571500" y="5238750"/>
-            <a:ext cx="11049000" cy="304800"/>
+            <a:off x="2190750" y="3168997"/>
+            <a:ext cx="7810500" cy="1234380"/>
           </a:xfrm>
           <a:prstGeom prst="rect">
             <a:avLst/>
@@ -6875,645 +6674,24 @@
           <a:p>
             <a:pPr algn="ctr">
               <a:lnSpc>
-                <a:spcPts val="2400"/>
+                <a:spcPts val="4860"/>
               </a:lnSpc>
             </a:pPr>
             <a:r>
-              <a:rPr sz="1500" b="0" i="1" u="none">
+              <a:rPr sz="4050" b="0" i="1" u="none">
                 <a:solidFill>
-                  <a:srgbClr val="94A3B8"/>
+                  <a:srgbClr val="F8FAFC"/>
                 </a:solidFill>
-                <a:latin typeface="Urbanist"/>
+                <a:latin typeface="Urbanist Light"/>
               </a:rPr>
-              <a:t>Une démonstration live est disponible sur demande pour explorer chaque module.</a:t>
-            </a:r>
-            <a:endParaRPr sz="1500" b="0" i="1" u="none">
+              <a:t> On ne peut pas gérer ce que l'on ne mesure pas. </a:t>
+            </a:r>
+            <a:endParaRPr sz="4050" b="0" i="1" u="none">
               <a:solidFill>
-                <a:srgbClr val="94A3B8"/>
+                <a:srgbClr val="F8FAFC"/>
               </a:solidFill>
-              <a:latin typeface="Urbanist"/>
+              <a:latin typeface="Urbanist Light"/>
             </a:endParaRPr>
-          </a:p>
-        </p:txBody>
-      </p:sp>
-      <p:sp>
-        <p:nvSpPr>
-          <p:cNvPr id="5" name="Rounded Rectangle 4"/>
-          <p:cNvSpPr/>
-          <p:nvPr/>
-        </p:nvSpPr>
-        <p:spPr>
-          <a:xfrm>
-            <a:off x="1672530" y="2505075"/>
-            <a:ext cx="228600" cy="228600"/>
-          </a:xfrm>
-          <a:prstGeom prst="roundRect">
-            <a:avLst>
-              <a:gd name="adj" fmla="val 50000"/>
-            </a:avLst>
-          </a:prstGeom>
-          <a:solidFill>
-            <a:srgbClr val="0F172A"/>
-          </a:solidFill>
-          <a:ln w="38100">
-            <a:solidFill>
-              <a:srgbClr val="F97316"/>
-            </a:solidFill>
-          </a:ln>
-          <a:effectLst/>
-        </p:spPr>
-        <p:style>
-          <a:lnRef idx="1">
-            <a:schemeClr val="accent1"/>
-          </a:lnRef>
-          <a:fillRef idx="3">
-            <a:schemeClr val="accent1"/>
-          </a:fillRef>
-          <a:effectRef idx="2">
-            <a:schemeClr val="accent1"/>
-          </a:effectRef>
-          <a:fontRef idx="minor">
-            <a:schemeClr val="lt1"/>
-          </a:fontRef>
-        </p:style>
-        <p:txBody>
-          <a:bodyPr rtlCol="0" anchor="ctr"/>
-          <a:lstStyle/>
-          <a:p>
-            <a:pPr algn="ctr"/>
-          </a:p>
-        </p:txBody>
-      </p:sp>
-      <p:sp>
-        <p:nvSpPr>
-          <p:cNvPr id="6" name="TextBox 5"/>
-          <p:cNvSpPr txBox="1"/>
-          <p:nvPr/>
-        </p:nvSpPr>
-        <p:spPr>
-          <a:xfrm>
-            <a:off x="510733" y="2924175"/>
-            <a:ext cx="2552193" cy="276225"/>
-          </a:xfrm>
-          <a:prstGeom prst="rect">
-            <a:avLst/>
-          </a:prstGeom>
-          <a:noFill/>
-        </p:spPr>
-        <p:txBody>
-          <a:bodyPr wrap="square" lIns="0" tIns="0" rIns="0" bIns="0" anchor="t">
-            <a:spAutoFit/>
-          </a:bodyPr>
-          <a:lstStyle/>
-          <a:p>
-            <a:pPr algn="ctr"/>
-            <a:r>
-              <a:rPr sz="1405" b="1" i="0" u="none">
-                <a:solidFill>
-                  <a:srgbClr val="FFFFFF"/>
-                </a:solidFill>
-                <a:latin typeface="Poppins"/>
-              </a:rPr>
-              <a:t>Connexion</a:t>
-            </a:r>
-            <a:endParaRPr sz="1405" b="1" i="0" u="none">
-              <a:solidFill>
-                <a:srgbClr val="FFFFFF"/>
-              </a:solidFill>
-              <a:latin typeface="Poppins"/>
-            </a:endParaRPr>
-          </a:p>
-        </p:txBody>
-      </p:sp>
-      <p:sp>
-        <p:nvSpPr>
-          <p:cNvPr id="7" name="TextBox 6"/>
-          <p:cNvSpPr txBox="1"/>
-          <p:nvPr/>
-        </p:nvSpPr>
-        <p:spPr>
-          <a:xfrm>
-            <a:off x="571500" y="3390900"/>
-            <a:ext cx="2430660" cy="609600"/>
-          </a:xfrm>
-          <a:prstGeom prst="rect">
-            <a:avLst/>
-          </a:prstGeom>
-          <a:noFill/>
-        </p:spPr>
-        <p:txBody>
-          <a:bodyPr wrap="square" lIns="0" tIns="0" rIns="0" bIns="0" anchor="t">
-            <a:spAutoFit/>
-          </a:bodyPr>
-          <a:lstStyle/>
-          <a:p>
-            <a:pPr algn="ctr">
-              <a:lnSpc>
-                <a:spcPts val="2400"/>
-              </a:lnSpc>
-            </a:pPr>
-            <a:r>
-              <a:rPr sz="1500" b="0" i="0" u="none">
-                <a:solidFill>
-                  <a:srgbClr val="CBD5E1"/>
-                </a:solidFill>
-                <a:latin typeface="Urbanist"/>
-              </a:rPr>
-              <a:t>Accès sécurisé à votre espace personnel.</a:t>
-            </a:r>
-            <a:endParaRPr sz="1500" b="0" i="0" u="none">
-              <a:solidFill>
-                <a:srgbClr val="CBD5E1"/>
-              </a:solidFill>
-              <a:latin typeface="Urbanist"/>
-            </a:endParaRPr>
-          </a:p>
-        </p:txBody>
-      </p:sp>
-      <p:sp>
-        <p:nvSpPr>
-          <p:cNvPr id="8" name="Rounded Rectangle 7"/>
-          <p:cNvSpPr/>
-          <p:nvPr/>
-        </p:nvSpPr>
-        <p:spPr>
-          <a:xfrm>
-            <a:off x="4545210" y="2505075"/>
-            <a:ext cx="228600" cy="228600"/>
-          </a:xfrm>
-          <a:prstGeom prst="roundRect">
-            <a:avLst>
-              <a:gd name="adj" fmla="val 50000"/>
-            </a:avLst>
-          </a:prstGeom>
-          <a:solidFill>
-            <a:srgbClr val="0F172A"/>
-          </a:solidFill>
-          <a:ln w="38100">
-            <a:solidFill>
-              <a:srgbClr val="F97316"/>
-            </a:solidFill>
-          </a:ln>
-          <a:effectLst/>
-        </p:spPr>
-        <p:style>
-          <a:lnRef idx="1">
-            <a:schemeClr val="accent1"/>
-          </a:lnRef>
-          <a:fillRef idx="3">
-            <a:schemeClr val="accent1"/>
-          </a:fillRef>
-          <a:effectRef idx="2">
-            <a:schemeClr val="accent1"/>
-          </a:effectRef>
-          <a:fontRef idx="minor">
-            <a:schemeClr val="lt1"/>
-          </a:fontRef>
-        </p:style>
-        <p:txBody>
-          <a:bodyPr rtlCol="0" anchor="ctr"/>
-          <a:lstStyle/>
-          <a:p>
-            <a:pPr algn="ctr"/>
-          </a:p>
-        </p:txBody>
-      </p:sp>
-      <p:sp>
-        <p:nvSpPr>
-          <p:cNvPr id="9" name="TextBox 8"/>
-          <p:cNvSpPr txBox="1"/>
-          <p:nvPr/>
-        </p:nvSpPr>
-        <p:spPr>
-          <a:xfrm>
-            <a:off x="3383413" y="2924175"/>
-            <a:ext cx="2552193" cy="276225"/>
-          </a:xfrm>
-          <a:prstGeom prst="rect">
-            <a:avLst/>
-          </a:prstGeom>
-          <a:noFill/>
-        </p:spPr>
-        <p:txBody>
-          <a:bodyPr wrap="square" lIns="0" tIns="0" rIns="0" bIns="0" anchor="t">
-            <a:spAutoFit/>
-          </a:bodyPr>
-          <a:lstStyle/>
-          <a:p>
-            <a:pPr algn="ctr"/>
-            <a:r>
-              <a:rPr sz="1405" b="1" i="0" u="none">
-                <a:solidFill>
-                  <a:srgbClr val="FFFFFF"/>
-                </a:solidFill>
-                <a:latin typeface="Poppins"/>
-              </a:rPr>
-              <a:t>Dashboard</a:t>
-            </a:r>
-            <a:endParaRPr sz="1405" b="1" i="0" u="none">
-              <a:solidFill>
-                <a:srgbClr val="FFFFFF"/>
-              </a:solidFill>
-              <a:latin typeface="Poppins"/>
-            </a:endParaRPr>
-          </a:p>
-        </p:txBody>
-      </p:sp>
-      <p:sp>
-        <p:nvSpPr>
-          <p:cNvPr id="10" name="TextBox 9"/>
-          <p:cNvSpPr txBox="1"/>
-          <p:nvPr/>
-        </p:nvSpPr>
-        <p:spPr>
-          <a:xfrm>
-            <a:off x="3444180" y="3390900"/>
-            <a:ext cx="2430660" cy="609600"/>
-          </a:xfrm>
-          <a:prstGeom prst="rect">
-            <a:avLst/>
-          </a:prstGeom>
-          <a:noFill/>
-        </p:spPr>
-        <p:txBody>
-          <a:bodyPr wrap="square" lIns="0" tIns="0" rIns="0" bIns="0" anchor="t">
-            <a:spAutoFit/>
-          </a:bodyPr>
-          <a:lstStyle/>
-          <a:p>
-            <a:pPr algn="ctr">
-              <a:lnSpc>
-                <a:spcPts val="2400"/>
-              </a:lnSpc>
-            </a:pPr>
-            <a:r>
-              <a:rPr sz="1500" b="0" i="0" u="none">
-                <a:solidFill>
-                  <a:srgbClr val="CBD5E1"/>
-                </a:solidFill>
-                <a:latin typeface="Urbanist"/>
-              </a:rPr>
-              <a:t>Vue d'ensemble de vos indicateurs clés.</a:t>
-            </a:r>
-            <a:endParaRPr sz="1500" b="0" i="0" u="none">
-              <a:solidFill>
-                <a:srgbClr val="CBD5E1"/>
-              </a:solidFill>
-              <a:latin typeface="Urbanist"/>
-            </a:endParaRPr>
-          </a:p>
-        </p:txBody>
-      </p:sp>
-      <p:sp>
-        <p:nvSpPr>
-          <p:cNvPr id="11" name="Rounded Rectangle 10"/>
-          <p:cNvSpPr/>
-          <p:nvPr/>
-        </p:nvSpPr>
-        <p:spPr>
-          <a:xfrm>
-            <a:off x="7417891" y="2505075"/>
-            <a:ext cx="228600" cy="228600"/>
-          </a:xfrm>
-          <a:prstGeom prst="roundRect">
-            <a:avLst>
-              <a:gd name="adj" fmla="val 50000"/>
-            </a:avLst>
-          </a:prstGeom>
-          <a:solidFill>
-            <a:srgbClr val="0F172A"/>
-          </a:solidFill>
-          <a:ln w="38100">
-            <a:solidFill>
-              <a:srgbClr val="F97316"/>
-            </a:solidFill>
-          </a:ln>
-          <a:effectLst/>
-        </p:spPr>
-        <p:style>
-          <a:lnRef idx="1">
-            <a:schemeClr val="accent1"/>
-          </a:lnRef>
-          <a:fillRef idx="3">
-            <a:schemeClr val="accent1"/>
-          </a:fillRef>
-          <a:effectRef idx="2">
-            <a:schemeClr val="accent1"/>
-          </a:effectRef>
-          <a:fontRef idx="minor">
-            <a:schemeClr val="lt1"/>
-          </a:fontRef>
-        </p:style>
-        <p:txBody>
-          <a:bodyPr rtlCol="0" anchor="ctr"/>
-          <a:lstStyle/>
-          <a:p>
-            <a:pPr algn="ctr"/>
-          </a:p>
-        </p:txBody>
-      </p:sp>
-      <p:sp>
-        <p:nvSpPr>
-          <p:cNvPr id="12" name="TextBox 11"/>
-          <p:cNvSpPr txBox="1"/>
-          <p:nvPr/>
-        </p:nvSpPr>
-        <p:spPr>
-          <a:xfrm>
-            <a:off x="6256094" y="2924175"/>
-            <a:ext cx="2552193" cy="276225"/>
-          </a:xfrm>
-          <a:prstGeom prst="rect">
-            <a:avLst/>
-          </a:prstGeom>
-          <a:noFill/>
-        </p:spPr>
-        <p:txBody>
-          <a:bodyPr wrap="square" lIns="0" tIns="0" rIns="0" bIns="0" anchor="t">
-            <a:spAutoFit/>
-          </a:bodyPr>
-          <a:lstStyle/>
-          <a:p>
-            <a:pPr algn="ctr"/>
-            <a:r>
-              <a:rPr sz="1405" b="1" i="0" u="none">
-                <a:solidFill>
-                  <a:srgbClr val="FFFFFF"/>
-                </a:solidFill>
-                <a:latin typeface="Poppins"/>
-              </a:rPr>
-              <a:t>Analyse IA</a:t>
-            </a:r>
-            <a:endParaRPr sz="1405" b="1" i="0" u="none">
-              <a:solidFill>
-                <a:srgbClr val="FFFFFF"/>
-              </a:solidFill>
-              <a:latin typeface="Poppins"/>
-            </a:endParaRPr>
-          </a:p>
-        </p:txBody>
-      </p:sp>
-      <p:sp>
-        <p:nvSpPr>
-          <p:cNvPr id="13" name="TextBox 12"/>
-          <p:cNvSpPr txBox="1"/>
-          <p:nvPr/>
-        </p:nvSpPr>
-        <p:spPr>
-          <a:xfrm>
-            <a:off x="6316860" y="3390900"/>
-            <a:ext cx="2430660" cy="609600"/>
-          </a:xfrm>
-          <a:prstGeom prst="rect">
-            <a:avLst/>
-          </a:prstGeom>
-          <a:noFill/>
-        </p:spPr>
-        <p:txBody>
-          <a:bodyPr wrap="square" lIns="0" tIns="0" rIns="0" bIns="0" anchor="t">
-            <a:spAutoFit/>
-          </a:bodyPr>
-          <a:lstStyle/>
-          <a:p>
-            <a:pPr algn="ctr">
-              <a:lnSpc>
-                <a:spcPts val="2400"/>
-              </a:lnSpc>
-            </a:pPr>
-            <a:r>
-              <a:rPr sz="1500" b="0" i="0" u="none">
-                <a:solidFill>
-                  <a:srgbClr val="CBD5E1"/>
-                </a:solidFill>
-                <a:latin typeface="Urbanist"/>
-              </a:rPr>
-              <a:t>Interprétation de vos données complexes.</a:t>
-            </a:r>
-            <a:endParaRPr sz="1500" b="0" i="0" u="none">
-              <a:solidFill>
-                <a:srgbClr val="CBD5E1"/>
-              </a:solidFill>
-              <a:latin typeface="Urbanist"/>
-            </a:endParaRPr>
-          </a:p>
-        </p:txBody>
-      </p:sp>
-      <p:sp>
-        <p:nvSpPr>
-          <p:cNvPr id="14" name="Rounded Rectangle 13"/>
-          <p:cNvSpPr/>
-          <p:nvPr/>
-        </p:nvSpPr>
-        <p:spPr>
-          <a:xfrm>
-            <a:off x="10290571" y="2505075"/>
-            <a:ext cx="228600" cy="228600"/>
-          </a:xfrm>
-          <a:prstGeom prst="roundRect">
-            <a:avLst>
-              <a:gd name="adj" fmla="val 50000"/>
-            </a:avLst>
-          </a:prstGeom>
-          <a:solidFill>
-            <a:srgbClr val="0F172A"/>
-          </a:solidFill>
-          <a:ln w="38100">
-            <a:solidFill>
-              <a:srgbClr val="22C55E"/>
-            </a:solidFill>
-          </a:ln>
-          <a:effectLst/>
-        </p:spPr>
-        <p:style>
-          <a:lnRef idx="1">
-            <a:schemeClr val="accent1"/>
-          </a:lnRef>
-          <a:fillRef idx="3">
-            <a:schemeClr val="accent1"/>
-          </a:fillRef>
-          <a:effectRef idx="2">
-            <a:schemeClr val="accent1"/>
-          </a:effectRef>
-          <a:fontRef idx="minor">
-            <a:schemeClr val="lt1"/>
-          </a:fontRef>
-        </p:style>
-        <p:txBody>
-          <a:bodyPr rtlCol="0" anchor="ctr"/>
-          <a:lstStyle/>
-          <a:p>
-            <a:pPr algn="ctr"/>
-          </a:p>
-        </p:txBody>
-      </p:sp>
-      <p:sp>
-        <p:nvSpPr>
-          <p:cNvPr id="15" name="TextBox 14"/>
-          <p:cNvSpPr txBox="1"/>
-          <p:nvPr/>
-        </p:nvSpPr>
-        <p:spPr>
-          <a:xfrm>
-            <a:off x="9128774" y="2924175"/>
-            <a:ext cx="2552193" cy="276225"/>
-          </a:xfrm>
-          <a:prstGeom prst="rect">
-            <a:avLst/>
-          </a:prstGeom>
-          <a:noFill/>
-        </p:spPr>
-        <p:txBody>
-          <a:bodyPr wrap="square" lIns="0" tIns="0" rIns="0" bIns="0" anchor="t">
-            <a:spAutoFit/>
-          </a:bodyPr>
-          <a:lstStyle/>
-          <a:p>
-            <a:pPr algn="ctr"/>
-            <a:r>
-              <a:rPr sz="1405" b="1" i="0" u="none">
-                <a:solidFill>
-                  <a:srgbClr val="FFFFFF"/>
-                </a:solidFill>
-                <a:latin typeface="Poppins"/>
-              </a:rPr>
-              <a:t>Optimisation</a:t>
-            </a:r>
-            <a:endParaRPr sz="1405" b="1" i="0" u="none">
-              <a:solidFill>
-                <a:srgbClr val="FFFFFF"/>
-              </a:solidFill>
-              <a:latin typeface="Poppins"/>
-            </a:endParaRPr>
-          </a:p>
-        </p:txBody>
-      </p:sp>
-      <p:sp>
-        <p:nvSpPr>
-          <p:cNvPr id="16" name="TextBox 15"/>
-          <p:cNvSpPr txBox="1"/>
-          <p:nvPr/>
-        </p:nvSpPr>
-        <p:spPr>
-          <a:xfrm>
-            <a:off x="9189541" y="3390900"/>
-            <a:ext cx="2430660" cy="609600"/>
-          </a:xfrm>
-          <a:prstGeom prst="rect">
-            <a:avLst/>
-          </a:prstGeom>
-          <a:noFill/>
-        </p:spPr>
-        <p:txBody>
-          <a:bodyPr wrap="square" lIns="0" tIns="0" rIns="0" bIns="0" anchor="t">
-            <a:spAutoFit/>
-          </a:bodyPr>
-          <a:lstStyle/>
-          <a:p>
-            <a:pPr algn="ctr">
-              <a:lnSpc>
-                <a:spcPts val="2400"/>
-              </a:lnSpc>
-            </a:pPr>
-            <a:r>
-              <a:rPr sz="1500" b="0" i="0" u="none">
-                <a:solidFill>
-                  <a:srgbClr val="CBD5E1"/>
-                </a:solidFill>
-                <a:latin typeface="Urbanist"/>
-              </a:rPr>
-              <a:t>Réduction active de votre consommation.</a:t>
-            </a:r>
-            <a:endParaRPr sz="1500" b="0" i="0" u="none">
-              <a:solidFill>
-                <a:srgbClr val="CBD5E1"/>
-              </a:solidFill>
-              <a:latin typeface="Urbanist"/>
-            </a:endParaRPr>
-          </a:p>
-        </p:txBody>
-      </p:sp>
-      <p:sp>
-        <p:nvSpPr>
-          <p:cNvPr id="17" name="TextBox 16"/>
-          <p:cNvSpPr txBox="1"/>
-          <p:nvPr/>
-        </p:nvSpPr>
-        <p:spPr>
-          <a:xfrm>
-            <a:off x="762000" y="571500"/>
-            <a:ext cx="11401425" cy="619125"/>
-          </a:xfrm>
-          <a:prstGeom prst="rect">
-            <a:avLst/>
-          </a:prstGeom>
-          <a:noFill/>
-        </p:spPr>
-        <p:txBody>
-          <a:bodyPr wrap="square" lIns="0" tIns="0" rIns="0" bIns="0" anchor="t">
-            <a:spAutoFit/>
-          </a:bodyPr>
-          <a:lstStyle/>
-          <a:p>
-            <a:pPr algn="l"/>
-            <a:r>
-              <a:rPr sz="3300" b="1" i="0" u="none">
-                <a:solidFill>
-                  <a:srgbClr val="FFFFFF"/>
-                </a:solidFill>
-                <a:latin typeface="Poppins"/>
-              </a:rPr>
-              <a:t>L'EXPÉRIENCE UTILISATEUR</a:t>
-            </a:r>
-            <a:endParaRPr sz="3300" b="1" i="0" u="none">
-              <a:solidFill>
-                <a:srgbClr val="FFFFFF"/>
-              </a:solidFill>
-              <a:latin typeface="Poppins"/>
-            </a:endParaRPr>
-          </a:p>
-        </p:txBody>
-      </p:sp>
-      <p:sp>
-        <p:nvSpPr>
-          <p:cNvPr id="18" name="Rectangle 17"/>
-          <p:cNvSpPr/>
-          <p:nvPr/>
-        </p:nvSpPr>
-        <p:spPr>
-          <a:xfrm>
-            <a:off x="571500" y="571500"/>
-            <a:ext cx="57150" cy="619125"/>
-          </a:xfrm>
-          <a:prstGeom prst="rect">
-            <a:avLst/>
-          </a:prstGeom>
-          <a:solidFill>
-            <a:srgbClr val="F97316"/>
-          </a:solidFill>
-          <a:ln>
-            <a:noFill/>
-          </a:ln>
-          <a:effectLst/>
-        </p:spPr>
-        <p:style>
-          <a:lnRef idx="1">
-            <a:schemeClr val="accent1"/>
-          </a:lnRef>
-          <a:fillRef idx="3">
-            <a:schemeClr val="accent1"/>
-          </a:fillRef>
-          <a:effectRef idx="2">
-            <a:schemeClr val="accent1"/>
-          </a:effectRef>
-          <a:fontRef idx="minor">
-            <a:schemeClr val="lt1"/>
-          </a:fontRef>
-        </p:style>
-        <p:txBody>
-          <a:bodyPr rtlCol="0" anchor="ctr"/>
-          <a:lstStyle/>
-          <a:p>
-            <a:pPr algn="ctr"/>
           </a:p>
         </p:txBody>
       </p:sp>
@@ -7543,64 +6721,16 @@
         <p:nvPr/>
       </p:nvGrpSpPr>
       <p:grpSpPr/>
-      <p:pic>
-        <p:nvPicPr>
-          <p:cNvPr id="2" name="Picture 1" descr="image.png"/>
-          <p:cNvPicPr>
-            <a:picLocks noChangeAspect="1"/>
-          </p:cNvPicPr>
-          <p:nvPr/>
-        </p:nvPicPr>
-        <p:blipFill>
-          <a:blip r:embed="rId1"/>
-          <a:stretch>
-            <a:fillRect/>
-          </a:stretch>
-        </p:blipFill>
-        <p:spPr>
-          <a:xfrm>
-            <a:off x="0" y="0"/>
-            <a:ext cx="12192000" cy="6858000"/>
-          </a:xfrm>
-          <a:prstGeom prst="rect">
-            <a:avLst/>
-          </a:prstGeom>
-        </p:spPr>
-      </p:pic>
-      <p:pic>
-        <p:nvPicPr>
-          <p:cNvPr id="3" name="Picture 2" descr="image.png"/>
-          <p:cNvPicPr>
-            <a:picLocks noChangeAspect="1"/>
-          </p:cNvPicPr>
-          <p:nvPr/>
-        </p:nvPicPr>
-        <p:blipFill>
-          <a:blip r:embed="rId2"/>
-          <a:stretch>
-            <a:fillRect/>
-          </a:stretch>
-        </p:blipFill>
-        <p:spPr>
-          <a:xfrm>
-            <a:off x="571500" y="1571625"/>
-            <a:ext cx="11049000" cy="4714875"/>
-          </a:xfrm>
-          <a:prstGeom prst="rect">
-            <a:avLst/>
-          </a:prstGeom>
-        </p:spPr>
-      </p:pic>
-      <p:sp>
-        <p:nvSpPr>
-          <p:cNvPr id="4" name="TextBox 3"/>
+      <p:sp>
+        <p:nvSpPr>
+          <p:cNvPr id="3" name="TextBox 2"/>
           <p:cNvSpPr txBox="1"/>
           <p:nvPr/>
         </p:nvSpPr>
         <p:spPr>
           <a:xfrm>
-            <a:off x="571500" y="4681537"/>
-            <a:ext cx="11049000" cy="304800"/>
+            <a:off x="4950856" y="1632644"/>
+            <a:ext cx="2290286" cy="1143000"/>
           </a:xfrm>
           <a:prstGeom prst="rect">
             <a:avLst/>
@@ -7613,62 +6743,17 @@
           </a:bodyPr>
           <a:lstStyle/>
           <a:p>
-            <a:pPr algn="ctr">
-              <a:lnSpc>
-                <a:spcPts val="2400"/>
-              </a:lnSpc>
-            </a:pPr>
-            <a:r>
-              <a:rPr sz="1500" b="0" i="0" u="none">
-                <a:solidFill>
-                  <a:srgbClr val="94A3B8"/>
-                </a:solidFill>
-                <a:latin typeface="Urbanist"/>
-              </a:rPr>
-              <a:t>Analyse basée sur un foyer type consommant 250 kWh/mois.</a:t>
-            </a:r>
-            <a:endParaRPr sz="1500" b="0" i="0" u="none">
-              <a:solidFill>
-                <a:srgbClr val="94A3B8"/>
-              </a:solidFill>
-              <a:latin typeface="Urbanist"/>
-            </a:endParaRPr>
-          </a:p>
-        </p:txBody>
-      </p:sp>
-      <p:sp>
-        <p:nvSpPr>
-          <p:cNvPr id="5" name="TextBox 4"/>
-          <p:cNvSpPr txBox="1"/>
-          <p:nvPr/>
-        </p:nvSpPr>
-        <p:spPr>
-          <a:xfrm>
-            <a:off x="762000" y="571500"/>
-            <a:ext cx="11401425" cy="619125"/>
-          </a:xfrm>
-          <a:prstGeom prst="rect">
-            <a:avLst/>
-          </a:prstGeom>
-          <a:noFill/>
-        </p:spPr>
-        <p:txBody>
-          <a:bodyPr wrap="square" lIns="0" tIns="0" rIns="0" bIns="0" anchor="t">
-            <a:spAutoFit/>
-          </a:bodyPr>
-          <a:lstStyle/>
-          <a:p>
-            <a:pPr algn="l"/>
-            <a:r>
-              <a:rPr sz="3300" b="1" i="0" u="none">
+            <a:pPr algn="ctr"/>
+            <a:r>
+              <a:rPr sz="6000" b="1" i="0" u="none">
                 <a:solidFill>
                   <a:srgbClr val="FFFFFF"/>
                 </a:solidFill>
                 <a:latin typeface="Poppins"/>
               </a:rPr>
-              <a:t>POTENTIEL DE RÉDUCTION MENSUELLE</a:t>
-            </a:r>
-            <a:endParaRPr sz="3300" b="1" i="0" u="none">
+              <a:t>Merci</a:t>
+            </a:r>
+            <a:endParaRPr sz="6000" b="1" i="0" u="none">
               <a:solidFill>
                 <a:srgbClr val="FFFFFF"/>
               </a:solidFill>
@@ -7679,45 +6764,46 @@
       </p:sp>
       <p:sp>
         <p:nvSpPr>
-          <p:cNvPr id="6" name="Rectangle 5"/>
-          <p:cNvSpPr/>
-          <p:nvPr/>
-        </p:nvSpPr>
-        <p:spPr>
-          <a:xfrm>
-            <a:off x="571500" y="571500"/>
-            <a:ext cx="57150" cy="619125"/>
-          </a:xfrm>
-          <a:prstGeom prst="rect">
-            <a:avLst/>
-          </a:prstGeom>
-          <a:solidFill>
-            <a:srgbClr val="F97316"/>
-          </a:solidFill>
-          <a:ln>
-            <a:noFill/>
-          </a:ln>
-          <a:effectLst/>
-        </p:spPr>
-        <p:style>
-          <a:lnRef idx="1">
-            <a:schemeClr val="accent1"/>
-          </a:lnRef>
-          <a:fillRef idx="3">
-            <a:schemeClr val="accent1"/>
-          </a:fillRef>
-          <a:effectRef idx="2">
-            <a:schemeClr val="accent1"/>
-          </a:effectRef>
-          <a:fontRef idx="minor">
-            <a:schemeClr val="lt1"/>
-          </a:fontRef>
-        </p:style>
-        <p:txBody>
-          <a:bodyPr rtlCol="0" anchor="ctr"/>
-          <a:lstStyle/>
-          <a:p>
-            <a:pPr algn="ctr"/>
+          <p:cNvPr id="4" name="TextBox 3"/>
+          <p:cNvSpPr txBox="1"/>
+          <p:nvPr/>
+        </p:nvSpPr>
+        <p:spPr>
+          <a:xfrm>
+            <a:off x="4195762" y="3175694"/>
+            <a:ext cx="3800475" cy="487560"/>
+          </a:xfrm>
+          <a:prstGeom prst="rect">
+            <a:avLst/>
+          </a:prstGeom>
+          <a:noFill/>
+        </p:spPr>
+        <p:txBody>
+          <a:bodyPr wrap="square" lIns="0" tIns="0" rIns="0" bIns="0" anchor="t">
+            <a:spAutoFit/>
+          </a:bodyPr>
+          <a:lstStyle/>
+          <a:p>
+            <a:pPr algn="ctr">
+              <a:lnSpc>
+                <a:spcPts val="3840"/>
+              </a:lnSpc>
+            </a:pPr>
+            <a:r>
+              <a:rPr sz="2400" b="0" i="0" u="none">
+                <a:solidFill>
+                  <a:srgbClr val="F97316"/>
+                </a:solidFill>
+                <a:latin typeface="Urbanist SemiBold"/>
+              </a:rPr>
+              <a:t>L'énergie à portée de main.</a:t>
+            </a:r>
+            <a:endParaRPr sz="2400" b="0" i="0" u="none">
+              <a:solidFill>
+                <a:srgbClr val="F97316"/>
+              </a:solidFill>
+              <a:latin typeface="Urbanist SemiBold"/>
+            </a:endParaRPr>
           </a:p>
         </p:txBody>
       </p:sp>
